--- a/Clase_6/PPTs/Clase06_Evaluacion_Logistica.pptx
+++ b/Clase_6/PPTs/Clase06_Evaluacion_Logistica.pptx
@@ -4,6 +4,9 @@
   <p:sldMasterIdLst>
     <p:sldMasterId id="2147483648" r:id="rId1"/>
   </p:sldMasterIdLst>
+  <p:notesMasterIdLst>
+    <p:notesMasterId r:id="rId9"/>
+  </p:notesMasterIdLst>
   <p:sldIdLst>
     <p:sldId id="256" r:id="rId2"/>
     <p:sldId id="257" r:id="rId3"/>
@@ -13,10 +16,7 @@
     <p:sldId id="261" r:id="rId7"/>
     <p:sldId id="262" r:id="rId8"/>
   </p:sldIdLst>
-  <p:notesMasterIdLst>
-    <p:notesMasterId r:id="rId9"/>
-  </p:notesMasterIdLst>
-  <p:sldSz cx="9144000" cy="5143500"/>
+  <p:sldSz cx="9144000" cy="5143500" type="screen16x9"/>
   <p:notesSz cx="5143500" cy="9144000"/>
   <p:defaultTextStyle>
     <a:lvl1pPr marL="0" algn="l" defTabSz="914400" rtl="0" eaLnBrk="1" latinLnBrk="0" hangingPunct="1">
@@ -110,6 +110,11 @@
       </a:defRPr>
     </a:lvl9pPr>
   </p:defaultTextStyle>
+  <p:extLst>
+    <p:ext uri="{EFAFB233-063F-42B5-8137-9DF3F51BA10A}">
+      <p15:sldGuideLst xmlns:p15="http://schemas.microsoft.com/office/powerpoint/2012/main"/>
+    </p:ext>
+  </p:extLst>
 </p:presentation>
 </file>
 
@@ -135,234 +140,10 @@
           <a:chExt cx="0" cy="0"/>
         </a:xfrm>
       </p:grpSpPr>
-      <p:sp>
-        <p:nvSpPr>
-          <p:cNvPr id="2" name="Header Placeholder 1"/>
-          <p:cNvSpPr>
-            <a:spLocks noGrp="1"/>
-          </p:cNvSpPr>
-          <p:nvPr>
-            <p:ph type="hdr" sz="quarter"/>
-          </p:nvPr>
-        </p:nvSpPr>
-        <p:spPr>
-          <a:xfrm>
-            <a:off x="0" y="0"/>
-            <a:ext cx="2971800" cy="458788"/>
-          </a:xfrm>
-          <a:prstGeom prst="rect">
-            <a:avLst/>
-          </a:prstGeom>
-        </p:spPr>
-        <p:txBody>
-          <a:bodyPr vert="horz" lIns="91440" tIns="45720" rIns="91440" bIns="45720" rtlCol="0"/>
-          <a:lstStyle>
-            <a:lvl1pPr algn="l">
-              <a:defRPr sz="1200"/>
-            </a:lvl1pPr>
-          </a:lstStyle>
-          <a:p>
-            <a:endParaRPr lang="en-US"/>
-          </a:p>
-        </p:txBody>
-      </p:sp>
-      <p:sp>
-        <p:nvSpPr>
-          <p:cNvPr id="3" name="Date Placeholder 2"/>
-          <p:cNvSpPr>
-            <a:spLocks noGrp="1"/>
-          </p:cNvSpPr>
-          <p:nvPr>
-            <p:ph type="dt" idx="1"/>
-          </p:nvPr>
-        </p:nvSpPr>
-        <p:spPr>
-          <a:xfrm>
-            <a:off x="3884613" y="0"/>
-            <a:ext cx="2971800" cy="458788"/>
-          </a:xfrm>
-          <a:prstGeom prst="rect">
-            <a:avLst/>
-          </a:prstGeom>
-        </p:spPr>
-        <p:txBody>
-          <a:bodyPr vert="horz" lIns="91440" tIns="45720" rIns="91440" bIns="45720" rtlCol="0"/>
-          <a:lstStyle>
-            <a:lvl1pPr algn="r">
-              <a:defRPr sz="1200"/>
-            </a:lvl1pPr>
-          </a:lstStyle>
-          <a:p>
-            <a:fld id="{5282F153-3F37-0F45-9E97-73ACFA13230C}" type="datetimeFigureOut">
-              <a:rPr lang="en-US"/>
-              <a:t>7/23/19</a:t>
-            </a:fld>
-            <a:endParaRPr lang="en-US"/>
-          </a:p>
-        </p:txBody>
-      </p:sp>
-      <p:sp>
-        <p:nvSpPr>
-          <p:cNvPr id="4" name="Slide Image Placeholder 3"/>
-          <p:cNvSpPr>
-            <a:spLocks noGrp="1" noRot="1" noChangeAspect="1"/>
-          </p:cNvSpPr>
-          <p:nvPr>
-            <p:ph type="sldImg" idx="2"/>
-          </p:nvPr>
-        </p:nvSpPr>
-        <p:spPr>
-          <a:xfrm>
-            <a:off x="685800" y="1143000"/>
-            <a:ext cx="5486400" cy="3086100"/>
-          </a:xfrm>
-          <a:prstGeom prst="rect">
-            <a:avLst/>
-          </a:prstGeom>
-          <a:noFill/>
-          <a:ln w="12700">
-            <a:solidFill>
-              <a:prstClr val="black"/>
-            </a:solidFill>
-          </a:ln>
-        </p:spPr>
-        <p:txBody>
-          <a:bodyPr vert="horz" lIns="91440" tIns="45720" rIns="91440" bIns="45720" rtlCol="0" anchor="ctr"/>
-          <a:lstStyle/>
-          <a:p>
-            <a:endParaRPr lang="en-US"/>
-          </a:p>
-        </p:txBody>
-      </p:sp>
-      <p:sp>
-        <p:nvSpPr>
-          <p:cNvPr id="5" name="Notes Placeholder 4"/>
-          <p:cNvSpPr>
-            <a:spLocks noGrp="1"/>
-          </p:cNvSpPr>
-          <p:nvPr>
-            <p:ph type="body" sz="quarter" idx="3"/>
-          </p:nvPr>
-        </p:nvSpPr>
-        <p:spPr>
-          <a:xfrm>
-            <a:off x="685800" y="4400550"/>
-            <a:ext cx="5486400" cy="3600450"/>
-          </a:xfrm>
-          <a:prstGeom prst="rect">
-            <a:avLst/>
-          </a:prstGeom>
-        </p:spPr>
-        <p:txBody>
-          <a:bodyPr vert="horz" lIns="91440" tIns="45720" rIns="91440" bIns="45720" rtlCol="0"/>
-          <a:lstStyle/>
-          <a:p>
-            <a:pPr lvl="0"/>
-            <a:r>
-              <a:rPr lang="en-US"/>
-              <a:t>Click to edit Master text styles</a:t>
-            </a:r>
-          </a:p>
-          <a:p>
-            <a:pPr lvl="1"/>
-            <a:r>
-              <a:rPr lang="en-US"/>
-              <a:t>Second level</a:t>
-            </a:r>
-          </a:p>
-          <a:p>
-            <a:pPr lvl="2"/>
-            <a:r>
-              <a:rPr lang="en-US"/>
-              <a:t>Third level</a:t>
-            </a:r>
-          </a:p>
-          <a:p>
-            <a:pPr lvl="3"/>
-            <a:r>
-              <a:rPr lang="en-US"/>
-              <a:t>Fourth level</a:t>
-            </a:r>
-          </a:p>
-          <a:p>
-            <a:pPr lvl="4"/>
-            <a:r>
-              <a:rPr lang="en-US"/>
-              <a:t>Fifth level</a:t>
-            </a:r>
-          </a:p>
-        </p:txBody>
-      </p:sp>
-      <p:sp>
-        <p:nvSpPr>
-          <p:cNvPr id="6" name="Footer Placeholder 5"/>
-          <p:cNvSpPr>
-            <a:spLocks noGrp="1"/>
-          </p:cNvSpPr>
-          <p:nvPr>
-            <p:ph type="ftr" sz="quarter" idx="4"/>
-          </p:nvPr>
-        </p:nvSpPr>
-        <p:spPr>
-          <a:xfrm>
-            <a:off x="0" y="8685213"/>
-            <a:ext cx="2971800" cy="458787"/>
-          </a:xfrm>
-          <a:prstGeom prst="rect">
-            <a:avLst/>
-          </a:prstGeom>
-        </p:spPr>
-        <p:txBody>
-          <a:bodyPr vert="horz" lIns="91440" tIns="45720" rIns="91440" bIns="45720" rtlCol="0" anchor="b"/>
-          <a:lstStyle>
-            <a:lvl1pPr algn="l">
-              <a:defRPr sz="1200"/>
-            </a:lvl1pPr>
-          </a:lstStyle>
-          <a:p>
-            <a:endParaRPr lang="en-US"/>
-          </a:p>
-        </p:txBody>
-      </p:sp>
-      <p:sp>
-        <p:nvSpPr>
-          <p:cNvPr id="7" name="Slide Number Placeholder 6"/>
-          <p:cNvSpPr>
-            <a:spLocks noGrp="1"/>
-          </p:cNvSpPr>
-          <p:nvPr>
-            <p:ph type="sldNum" sz="quarter" idx="5"/>
-          </p:nvPr>
-        </p:nvSpPr>
-        <p:spPr>
-          <a:xfrm>
-            <a:off x="3884613" y="8685213"/>
-            <a:ext cx="2971800" cy="458787"/>
-          </a:xfrm>
-          <a:prstGeom prst="rect">
-            <a:avLst/>
-          </a:prstGeom>
-        </p:spPr>
-        <p:txBody>
-          <a:bodyPr vert="horz" lIns="91440" tIns="45720" rIns="91440" bIns="45720" rtlCol="0" anchor="b"/>
-          <a:lstStyle>
-            <a:lvl1pPr algn="r">
-              <a:defRPr sz="1200"/>
-            </a:lvl1pPr>
-          </a:lstStyle>
-          <a:p>
-            <a:fld id="{CE5E9CC1-C706-0F49-92D6-E571CC5EEA8F}" type="slidenum">
-              <a:rPr lang="en-US"/>
-              <a:t>‹#›</a:t>
-            </a:fld>
-            <a:endParaRPr lang="en-US"/>
-          </a:p>
-        </p:txBody>
-      </p:sp>
     </p:spTree>
     <p:extLst>
       <p:ext uri="{BB962C8B-B14F-4D97-AF65-F5344CB8AC3E}">
-        <p14:creationId xmlns:p14="http://schemas.microsoft.com/office/powerpoint/2010/main" val="1024086991"/>
+        <p14:creationId xmlns:p14="http://schemas.microsoft.com/office/powerpoint/2010/main" val="1316634244"/>
       </p:ext>
     </p:extLst>
   </p:cSld>
@@ -506,10 +287,6 @@
           <a:bodyPr/>
           <a:lstStyle/>
           <a:p>
-            <a:r>
-              <a:rPr lang="en-US" dirty="0"/>
-              <a:t/>
-            </a:r>
             <a:endParaRPr lang="en-US" dirty="0"/>
           </a:p>
         </p:txBody>
@@ -594,10 +371,6 @@
           <a:bodyPr/>
           <a:lstStyle/>
           <a:p>
-            <a:r>
-              <a:rPr lang="en-US" dirty="0"/>
-              <a:t/>
-            </a:r>
             <a:endParaRPr lang="en-US" dirty="0"/>
           </a:p>
         </p:txBody>
@@ -682,10 +455,6 @@
           <a:bodyPr/>
           <a:lstStyle/>
           <a:p>
-            <a:r>
-              <a:rPr lang="en-US" dirty="0"/>
-              <a:t/>
-            </a:r>
             <a:endParaRPr lang="en-US" dirty="0"/>
           </a:p>
         </p:txBody>
@@ -770,10 +539,6 @@
           <a:bodyPr/>
           <a:lstStyle/>
           <a:p>
-            <a:r>
-              <a:rPr lang="en-US" dirty="0"/>
-              <a:t/>
-            </a:r>
             <a:endParaRPr lang="en-US" dirty="0"/>
           </a:p>
         </p:txBody>
@@ -858,10 +623,6 @@
           <a:bodyPr/>
           <a:lstStyle/>
           <a:p>
-            <a:r>
-              <a:rPr lang="en-US" dirty="0"/>
-              <a:t/>
-            </a:r>
             <a:endParaRPr lang="en-US" dirty="0"/>
           </a:p>
         </p:txBody>
@@ -946,10 +707,6 @@
           <a:bodyPr/>
           <a:lstStyle/>
           <a:p>
-            <a:r>
-              <a:rPr lang="en-US" dirty="0"/>
-              <a:t/>
-            </a:r>
             <a:endParaRPr lang="en-US" dirty="0"/>
           </a:p>
         </p:txBody>
@@ -1034,10 +791,6 @@
           <a:bodyPr/>
           <a:lstStyle/>
           <a:p>
-            <a:r>
-              <a:rPr lang="en-US" dirty="0"/>
-              <a:t/>
-            </a:r>
             <a:endParaRPr lang="en-US" dirty="0"/>
           </a:p>
         </p:txBody>
@@ -1111,6 +864,11 @@
 <file path=ppt/slideMasters/slideMaster1.xml><?xml version="1.0" encoding="utf-8"?>
 <p:sldMaster xmlns:a="http://schemas.openxmlformats.org/drawingml/2006/main" xmlns:r="http://schemas.openxmlformats.org/officeDocument/2006/relationships" xmlns:p="http://schemas.openxmlformats.org/presentationml/2006/main">
   <p:cSld>
+    <p:bg>
+      <p:bgRef idx="1001">
+        <a:schemeClr val="bg1"/>
+      </p:bgRef>
+    </p:bg>
     <p:spTree>
       <p:nvGrpSpPr>
         <p:cNvPr id="1" name=""/>
@@ -1393,6 +1151,7 @@
         <a:solidFill>
           <a:srgbClr val="FFFFFF"/>
         </a:solidFill>
+        <a:effectLst/>
       </p:bgPr>
     </p:bg>
     <p:spTree>
@@ -1470,7 +1229,7 @@
             <a:off x="5669280" y="274320"/>
             <a:ext cx="3840480" cy="3840480"/>
           </a:xfrm>
-          <a:prstGeom prst="oval">
+          <a:prstGeom prst="line">
             <a:avLst/>
           </a:prstGeom>
           <a:solidFill>
@@ -1534,11 +1293,11 @@
           <a:bodyPr wrap="square" lIns="0" tIns="0" rIns="0" bIns="0" rtlCol="0" anchor="ctr"/>
           <a:lstStyle/>
           <a:p>
-            <a:pPr indent="0" marL="0">
-              <a:buNone/>
-            </a:pPr>
-            <a:r>
-              <a:rPr lang="en-US" sz="750" b="1" spc="100" kern="0" dirty="0">
+            <a:pPr marL="0" indent="0">
+              <a:buNone/>
+            </a:pPr>
+            <a:r>
+              <a:rPr lang="en-US" sz="750" b="1" kern="0" spc="100" dirty="0">
                 <a:solidFill>
                   <a:srgbClr val="1A5276"/>
                 </a:solidFill>
@@ -1573,7 +1332,7 @@
           <a:bodyPr wrap="square" lIns="0" tIns="0" rIns="0" bIns="0" rtlCol="0" anchor="ctr"/>
           <a:lstStyle/>
           <a:p>
-            <a:pPr indent="0" marL="0">
+            <a:pPr marL="0" indent="0">
               <a:lnSpc>
                 <a:spcPct val="108000"/>
               </a:lnSpc>
@@ -1593,7 +1352,7 @@
             <a:endParaRPr lang="en-US" sz="2800" dirty="0"/>
           </a:p>
           <a:p>
-            <a:pPr indent="0" marL="0">
+            <a:pPr marL="0" indent="0">
               <a:lnSpc>
                 <a:spcPct val="108000"/>
               </a:lnSpc>
@@ -1635,7 +1394,7 @@
           <a:bodyPr wrap="square" lIns="0" tIns="0" rIns="0" bIns="0" rtlCol="0" anchor="ctr"/>
           <a:lstStyle/>
           <a:p>
-            <a:pPr indent="0" marL="0">
+            <a:pPr marL="0" indent="0">
               <a:buNone/>
             </a:pPr>
             <a:r>
@@ -1697,7 +1456,7 @@
           <a:bodyPr wrap="square" lIns="0" tIns="0" rIns="0" bIns="0" rtlCol="0" anchor="ctr"/>
           <a:lstStyle/>
           <a:p>
-            <a:pPr indent="0" marL="0">
+            <a:pPr marL="0" indent="0">
               <a:buNone/>
             </a:pPr>
             <a:r>
@@ -1736,7 +1495,7 @@
           <a:bodyPr wrap="square" lIns="0" tIns="0" rIns="0" bIns="0" rtlCol="0" anchor="ctr"/>
           <a:lstStyle/>
           <a:p>
-            <a:pPr indent="0" marL="0">
+            <a:pPr marL="0" indent="0">
               <a:buNone/>
             </a:pPr>
             <a:r>
@@ -1775,7 +1534,7 @@
           <a:bodyPr wrap="square" lIns="0" tIns="0" rIns="0" bIns="0" rtlCol="0" anchor="ctr"/>
           <a:lstStyle/>
           <a:p>
-            <a:pPr indent="0" marL="0">
+            <a:pPr marL="0" indent="0">
               <a:buNone/>
             </a:pPr>
             <a:r>
@@ -1814,7 +1573,7 @@
           <a:bodyPr wrap="square" lIns="0" tIns="0" rIns="0" bIns="0" rtlCol="0" anchor="ctr"/>
           <a:lstStyle/>
           <a:p>
-            <a:pPr algn="ctr" indent="0" marL="0">
+            <a:pPr marL="0" indent="0" algn="ctr">
               <a:buNone/>
             </a:pPr>
             <a:r>
@@ -1850,6 +1609,7 @@
         <a:solidFill>
           <a:srgbClr val="FFFFFF"/>
         </a:solidFill>
+        <a:effectLst/>
       </p:bgPr>
     </p:bg>
     <p:spTree>
@@ -1937,7 +1697,7 @@
           <a:bodyPr wrap="square" lIns="0" tIns="0" rIns="0" bIns="0" rtlCol="0" anchor="ctr"/>
           <a:lstStyle/>
           <a:p>
-            <a:pPr indent="0" marL="0">
+            <a:pPr marL="0" indent="0">
               <a:buNone/>
             </a:pPr>
             <a:r>
@@ -1979,7 +1739,7 @@
             <a:prstDash val="solid"/>
           </a:ln>
           <a:effectLst>
-            <a:outerShdw sx="100000" sy="100000" kx="0" ky="0" algn="bl" rotWithShape="0" blurRad="101600" dist="38100" dir="8100000">
+            <a:outerShdw blurRad="101600" dist="38100" dir="8100000" algn="bl" rotWithShape="0">
               <a:srgbClr val="9EAFC0">
                 <a:alpha val="13000"/>
               </a:srgbClr>
@@ -2033,7 +1793,7 @@
           <a:bodyPr wrap="square" lIns="0" tIns="0" rIns="0" bIns="0" rtlCol="0" anchor="ctr"/>
           <a:lstStyle/>
           <a:p>
-            <a:pPr indent="0" marL="0">
+            <a:pPr marL="0" indent="0">
               <a:buNone/>
             </a:pPr>
             <a:r>
@@ -2097,7 +1857,7 @@
           <a:bodyPr wrap="square" lIns="0" tIns="0" rIns="0" bIns="0" rtlCol="0" anchor="ctr"/>
           <a:lstStyle/>
           <a:p>
-            <a:pPr indent="0" marL="0">
+            <a:pPr marL="0" indent="0">
               <a:buNone/>
             </a:pPr>
             <a:r>
@@ -2136,7 +1896,7 @@
           <a:bodyPr wrap="square" lIns="0" tIns="0" rIns="0" bIns="0" rtlCol="0" anchor="ctr"/>
           <a:lstStyle/>
           <a:p>
-            <a:pPr indent="0" marL="0">
+            <a:pPr marL="0" indent="0">
               <a:lnSpc>
                 <a:spcPct val="130000"/>
               </a:lnSpc>
@@ -2181,7 +1941,7 @@
             <a:prstDash val="solid"/>
           </a:ln>
           <a:effectLst>
-            <a:outerShdw sx="100000" sy="100000" kx="0" ky="0" algn="bl" rotWithShape="0" blurRad="101600" dist="38100" dir="8100000">
+            <a:outerShdw blurRad="101600" dist="38100" dir="8100000" algn="bl" rotWithShape="0">
               <a:srgbClr val="9EAFC0">
                 <a:alpha val="13000"/>
               </a:srgbClr>
@@ -2235,7 +1995,7 @@
           <a:bodyPr wrap="square" lIns="0" tIns="0" rIns="0" bIns="0" rtlCol="0" anchor="ctr"/>
           <a:lstStyle/>
           <a:p>
-            <a:pPr indent="0" marL="0">
+            <a:pPr marL="0" indent="0">
               <a:buNone/>
             </a:pPr>
             <a:r>
@@ -2299,7 +2059,7 @@
           <a:bodyPr wrap="square" lIns="0" tIns="0" rIns="0" bIns="0" rtlCol="0" anchor="ctr"/>
           <a:lstStyle/>
           <a:p>
-            <a:pPr indent="0" marL="0">
+            <a:pPr marL="0" indent="0">
               <a:buNone/>
             </a:pPr>
             <a:r>
@@ -2338,7 +2098,7 @@
           <a:bodyPr wrap="square" lIns="0" tIns="0" rIns="0" bIns="0" rtlCol="0" anchor="ctr"/>
           <a:lstStyle/>
           <a:p>
-            <a:pPr indent="0" marL="0">
+            <a:pPr marL="0" indent="0">
               <a:lnSpc>
                 <a:spcPct val="130000"/>
               </a:lnSpc>
@@ -2383,7 +2143,7 @@
             <a:prstDash val="solid"/>
           </a:ln>
           <a:effectLst>
-            <a:outerShdw sx="100000" sy="100000" kx="0" ky="0" algn="bl" rotWithShape="0" blurRad="101600" dist="38100" dir="8100000">
+            <a:outerShdw blurRad="101600" dist="38100" dir="8100000" algn="bl" rotWithShape="0">
               <a:srgbClr val="9EAFC0">
                 <a:alpha val="13000"/>
               </a:srgbClr>
@@ -2437,7 +2197,7 @@
           <a:bodyPr wrap="square" lIns="0" tIns="0" rIns="0" bIns="0" rtlCol="0" anchor="ctr"/>
           <a:lstStyle/>
           <a:p>
-            <a:pPr indent="0" marL="0">
+            <a:pPr marL="0" indent="0">
               <a:buNone/>
             </a:pPr>
             <a:r>
@@ -2501,7 +2261,7 @@
           <a:bodyPr wrap="square" lIns="0" tIns="0" rIns="0" bIns="0" rtlCol="0" anchor="ctr"/>
           <a:lstStyle/>
           <a:p>
-            <a:pPr indent="0" marL="0">
+            <a:pPr marL="0" indent="0">
               <a:buNone/>
             </a:pPr>
             <a:r>
@@ -2540,7 +2300,7 @@
           <a:bodyPr wrap="square" lIns="0" tIns="0" rIns="0" bIns="0" rtlCol="0" anchor="ctr"/>
           <a:lstStyle/>
           <a:p>
-            <a:pPr indent="0" marL="0">
+            <a:pPr marL="0" indent="0">
               <a:lnSpc>
                 <a:spcPct val="130000"/>
               </a:lnSpc>
@@ -2585,7 +2345,7 @@
             <a:prstDash val="solid"/>
           </a:ln>
           <a:effectLst>
-            <a:outerShdw sx="100000" sy="100000" kx="0" ky="0" algn="bl" rotWithShape="0" blurRad="101600" dist="38100" dir="8100000">
+            <a:outerShdw blurRad="101600" dist="38100" dir="8100000" algn="bl" rotWithShape="0">
               <a:srgbClr val="9EAFC0">
                 <a:alpha val="13000"/>
               </a:srgbClr>
@@ -2639,7 +2399,7 @@
           <a:bodyPr wrap="square" lIns="0" tIns="0" rIns="0" bIns="0" rtlCol="0" anchor="ctr"/>
           <a:lstStyle/>
           <a:p>
-            <a:pPr indent="0" marL="0">
+            <a:pPr marL="0" indent="0">
               <a:buNone/>
             </a:pPr>
             <a:r>
@@ -2703,7 +2463,7 @@
           <a:bodyPr wrap="square" lIns="0" tIns="0" rIns="0" bIns="0" rtlCol="0" anchor="ctr"/>
           <a:lstStyle/>
           <a:p>
-            <a:pPr indent="0" marL="0">
+            <a:pPr marL="0" indent="0">
               <a:buNone/>
             </a:pPr>
             <a:r>
@@ -2742,7 +2502,7 @@
           <a:bodyPr wrap="square" lIns="0" tIns="0" rIns="0" bIns="0" rtlCol="0" anchor="ctr"/>
           <a:lstStyle/>
           <a:p>
-            <a:pPr indent="0" marL="0">
+            <a:pPr marL="0" indent="0">
               <a:lnSpc>
                 <a:spcPct val="130000"/>
               </a:lnSpc>
@@ -2809,7 +2569,7 @@
           <a:bodyPr wrap="square" lIns="0" tIns="0" rIns="0" bIns="0" rtlCol="0" anchor="ctr"/>
           <a:lstStyle/>
           <a:p>
-            <a:pPr indent="0" marL="0">
+            <a:pPr marL="0" indent="0">
               <a:buNone/>
             </a:pPr>
             <a:r>
@@ -2843,6 +2603,7 @@
         <a:solidFill>
           <a:srgbClr val="F7FBFF"/>
         </a:solidFill>
+        <a:effectLst/>
       </p:bgPr>
     </p:bg>
     <p:spTree>
@@ -2905,7 +2666,7 @@
           <a:bodyPr wrap="square" lIns="0" tIns="0" rIns="0" bIns="0" rtlCol="0" anchor="ctr"/>
           <a:lstStyle/>
           <a:p>
-            <a:pPr indent="0" marL="0">
+            <a:pPr marL="0" indent="0">
               <a:buNone/>
             </a:pPr>
             <a:r>
@@ -2944,7 +2705,7 @@
           <a:bodyPr wrap="square" lIns="0" tIns="0" rIns="0" bIns="0" rtlCol="0" anchor="ctr"/>
           <a:lstStyle/>
           <a:p>
-            <a:pPr indent="0" marL="0">
+            <a:pPr marL="0" indent="0">
               <a:buNone/>
             </a:pPr>
             <a:r>
@@ -2983,7 +2744,7 @@
           <a:bodyPr wrap="square" lIns="0" tIns="0" rIns="0" bIns="0" rtlCol="0" anchor="ctr"/>
           <a:lstStyle/>
           <a:p>
-            <a:pPr indent="0" marL="0">
+            <a:pPr marL="0" indent="0">
               <a:buNone/>
             </a:pPr>
             <a:r>
@@ -3025,7 +2786,7 @@
             <a:prstDash val="solid"/>
           </a:ln>
           <a:effectLst>
-            <a:outerShdw sx="100000" sy="100000" kx="0" ky="0" algn="bl" rotWithShape="0" blurRad="101600" dist="38100" dir="8100000">
+            <a:outerShdw blurRad="101600" dist="38100" dir="8100000" algn="bl" rotWithShape="0">
               <a:srgbClr val="9EAFC0">
                 <a:alpha val="13000"/>
               </a:srgbClr>
@@ -3079,7 +2840,7 @@
           <a:bodyPr wrap="square" lIns="0" tIns="0" rIns="0" bIns="0" rtlCol="0" anchor="ctr"/>
           <a:lstStyle/>
           <a:p>
-            <a:pPr indent="0" marL="0">
+            <a:pPr marL="0" indent="0">
               <a:buNone/>
             </a:pPr>
             <a:r>
@@ -3143,7 +2904,7 @@
           <a:bodyPr wrap="square" lIns="0" tIns="0" rIns="0" bIns="0" rtlCol="0" anchor="ctr"/>
           <a:lstStyle/>
           <a:p>
-            <a:pPr indent="0" marL="0">
+            <a:pPr marL="0" indent="0">
               <a:buNone/>
             </a:pPr>
             <a:r>
@@ -3182,7 +2943,7 @@
           <a:bodyPr wrap="square" lIns="0" tIns="0" rIns="0" bIns="0" rtlCol="0" anchor="ctr"/>
           <a:lstStyle/>
           <a:p>
-            <a:pPr indent="0" marL="0">
+            <a:pPr marL="0" indent="0">
               <a:buNone/>
             </a:pPr>
             <a:r>
@@ -3246,7 +3007,7 @@
           <a:bodyPr wrap="square" lIns="0" tIns="0" rIns="0" bIns="0" rtlCol="0" anchor="ctr"/>
           <a:lstStyle/>
           <a:p>
-            <a:pPr indent="0" marL="0">
+            <a:pPr marL="0" indent="0">
               <a:buNone/>
             </a:pPr>
             <a:r>
@@ -3285,7 +3046,7 @@
           <a:bodyPr wrap="square" lIns="0" tIns="0" rIns="0" bIns="0" rtlCol="0" anchor="ctr"/>
           <a:lstStyle/>
           <a:p>
-            <a:pPr indent="0" marL="0">
+            <a:pPr marL="0" indent="0">
               <a:buNone/>
             </a:pPr>
             <a:r>
@@ -3349,7 +3110,7 @@
           <a:bodyPr wrap="square" lIns="0" tIns="0" rIns="0" bIns="0" rtlCol="0" anchor="ctr"/>
           <a:lstStyle/>
           <a:p>
-            <a:pPr indent="0" marL="0">
+            <a:pPr marL="0" indent="0">
               <a:buNone/>
             </a:pPr>
             <a:r>
@@ -3388,7 +3149,7 @@
           <a:bodyPr wrap="square" lIns="0" tIns="0" rIns="0" bIns="0" rtlCol="0" anchor="ctr"/>
           <a:lstStyle/>
           <a:p>
-            <a:pPr indent="0" marL="0">
+            <a:pPr marL="0" indent="0">
               <a:buNone/>
             </a:pPr>
             <a:r>
@@ -3452,7 +3213,7 @@
           <a:bodyPr wrap="square" lIns="0" tIns="0" rIns="0" bIns="0" rtlCol="0" anchor="ctr"/>
           <a:lstStyle/>
           <a:p>
-            <a:pPr indent="0" marL="0">
+            <a:pPr marL="0" indent="0">
               <a:buNone/>
             </a:pPr>
             <a:r>
@@ -3491,7 +3252,7 @@
           <a:bodyPr wrap="square" lIns="0" tIns="0" rIns="0" bIns="0" rtlCol="0" anchor="ctr"/>
           <a:lstStyle/>
           <a:p>
-            <a:pPr indent="0" marL="0">
+            <a:pPr marL="0" indent="0">
               <a:buNone/>
             </a:pPr>
             <a:r>
@@ -3555,7 +3316,7 @@
           <a:bodyPr wrap="square" lIns="0" tIns="0" rIns="0" bIns="0" rtlCol="0" anchor="ctr"/>
           <a:lstStyle/>
           <a:p>
-            <a:pPr indent="0" marL="0">
+            <a:pPr marL="0" indent="0">
               <a:buNone/>
             </a:pPr>
             <a:r>
@@ -3594,7 +3355,7 @@
           <a:bodyPr wrap="square" lIns="0" tIns="0" rIns="0" bIns="0" rtlCol="0" anchor="ctr"/>
           <a:lstStyle/>
           <a:p>
-            <a:pPr indent="0" marL="0">
+            <a:pPr marL="0" indent="0">
               <a:buNone/>
             </a:pPr>
             <a:r>
@@ -3658,7 +3419,7 @@
           <a:bodyPr wrap="square" lIns="0" tIns="0" rIns="0" bIns="0" rtlCol="0" anchor="ctr"/>
           <a:lstStyle/>
           <a:p>
-            <a:pPr indent="0" marL="0">
+            <a:pPr marL="0" indent="0">
               <a:buNone/>
             </a:pPr>
             <a:r>
@@ -3697,7 +3458,7 @@
           <a:bodyPr wrap="square" lIns="0" tIns="0" rIns="0" bIns="0" rtlCol="0" anchor="ctr"/>
           <a:lstStyle/>
           <a:p>
-            <a:pPr indent="0" marL="0">
+            <a:pPr marL="0" indent="0">
               <a:buNone/>
             </a:pPr>
             <a:r>
@@ -3736,7 +3497,7 @@
           <a:bodyPr wrap="square" lIns="0" tIns="0" rIns="0" bIns="0" rtlCol="0" anchor="ctr"/>
           <a:lstStyle/>
           <a:p>
-            <a:pPr indent="0" marL="0">
+            <a:pPr marL="0" indent="0">
               <a:buNone/>
             </a:pPr>
             <a:r>
@@ -3775,7 +3536,7 @@
           <a:bodyPr wrap="square" lIns="0" tIns="0" rIns="0" bIns="0" rtlCol="0" anchor="ctr"/>
           <a:lstStyle/>
           <a:p>
-            <a:pPr indent="0" marL="0">
+            <a:pPr marL="0" indent="0">
               <a:buNone/>
             </a:pPr>
             <a:r>
@@ -3814,7 +3575,7 @@
           <a:bodyPr wrap="square" lIns="0" tIns="0" rIns="0" bIns="0" rtlCol="0" anchor="ctr"/>
           <a:lstStyle/>
           <a:p>
-            <a:pPr indent="0" marL="0">
+            <a:pPr marL="0" indent="0">
               <a:buNone/>
             </a:pPr>
             <a:r>
@@ -3853,7 +3614,7 @@
           <a:bodyPr wrap="square" lIns="0" tIns="0" rIns="0" bIns="0" rtlCol="0" anchor="ctr"/>
           <a:lstStyle/>
           <a:p>
-            <a:pPr indent="0" marL="0">
+            <a:pPr marL="0" indent="0">
               <a:buNone/>
             </a:pPr>
             <a:r>
@@ -3892,7 +3653,7 @@
           <a:bodyPr wrap="square" lIns="0" tIns="0" rIns="0" bIns="0" rtlCol="0" anchor="ctr"/>
           <a:lstStyle/>
           <a:p>
-            <a:pPr indent="0" marL="0">
+            <a:pPr marL="0" indent="0">
               <a:buNone/>
             </a:pPr>
             <a:r>
@@ -3931,7 +3692,7 @@
           <a:bodyPr wrap="square" lIns="0" tIns="0" rIns="0" bIns="0" rtlCol="0" anchor="ctr"/>
           <a:lstStyle/>
           <a:p>
-            <a:pPr indent="0" marL="0">
+            <a:pPr marL="0" indent="0">
               <a:buNone/>
             </a:pPr>
             <a:r>
@@ -3973,7 +3734,7 @@
             <a:prstDash val="solid"/>
           </a:ln>
           <a:effectLst>
-            <a:outerShdw sx="100000" sy="100000" kx="0" ky="0" algn="bl" rotWithShape="0" blurRad="101600" dist="38100" dir="8100000">
+            <a:outerShdw blurRad="101600" dist="38100" dir="8100000" algn="bl" rotWithShape="0">
               <a:srgbClr val="9EAFC0">
                 <a:alpha val="13000"/>
               </a:srgbClr>
@@ -4027,7 +3788,7 @@
           <a:bodyPr wrap="square" lIns="0" tIns="0" rIns="0" bIns="0" rtlCol="0" anchor="ctr"/>
           <a:lstStyle/>
           <a:p>
-            <a:pPr indent="0" marL="0">
+            <a:pPr marL="0" indent="0">
               <a:buNone/>
             </a:pPr>
             <a:r>
@@ -4091,7 +3852,7 @@
           <a:bodyPr wrap="square" lIns="0" tIns="0" rIns="0" bIns="0" rtlCol="0" anchor="ctr"/>
           <a:lstStyle/>
           <a:p>
-            <a:pPr indent="0" marL="0">
+            <a:pPr marL="0" indent="0">
               <a:buNone/>
             </a:pPr>
             <a:r>
@@ -4130,7 +3891,7 @@
           <a:bodyPr wrap="square" lIns="0" tIns="0" rIns="0" bIns="0" rtlCol="0" anchor="ctr"/>
           <a:lstStyle/>
           <a:p>
-            <a:pPr indent="0" marL="0">
+            <a:pPr marL="0" indent="0">
               <a:buNone/>
             </a:pPr>
             <a:r>
@@ -4169,7 +3930,7 @@
           <a:bodyPr wrap="square" lIns="0" tIns="0" rIns="0" bIns="0" rtlCol="0" anchor="ctr"/>
           <a:lstStyle/>
           <a:p>
-            <a:pPr indent="0" marL="0">
+            <a:pPr marL="0" indent="0">
               <a:buNone/>
             </a:pPr>
             <a:r>
@@ -4233,7 +3994,7 @@
           <a:bodyPr wrap="square" lIns="0" tIns="0" rIns="0" bIns="0" rtlCol="0" anchor="ctr"/>
           <a:lstStyle/>
           <a:p>
-            <a:pPr indent="0" marL="0">
+            <a:pPr marL="0" indent="0">
               <a:buNone/>
             </a:pPr>
             <a:r>
@@ -4272,7 +4033,7 @@
           <a:bodyPr wrap="square" lIns="0" tIns="0" rIns="0" bIns="0" rtlCol="0" anchor="ctr"/>
           <a:lstStyle/>
           <a:p>
-            <a:pPr indent="0" marL="0">
+            <a:pPr marL="0" indent="0">
               <a:buNone/>
             </a:pPr>
             <a:r>
@@ -4311,7 +4072,7 @@
           <a:bodyPr wrap="square" lIns="0" tIns="0" rIns="0" bIns="0" rtlCol="0" anchor="ctr"/>
           <a:lstStyle/>
           <a:p>
-            <a:pPr indent="0" marL="0">
+            <a:pPr marL="0" indent="0">
               <a:buNone/>
             </a:pPr>
             <a:r>
@@ -4375,7 +4136,7 @@
           <a:bodyPr wrap="square" lIns="0" tIns="0" rIns="0" bIns="0" rtlCol="0" anchor="ctr"/>
           <a:lstStyle/>
           <a:p>
-            <a:pPr indent="0" marL="0">
+            <a:pPr marL="0" indent="0">
               <a:buNone/>
             </a:pPr>
             <a:r>
@@ -4414,7 +4175,7 @@
           <a:bodyPr wrap="square" lIns="0" tIns="0" rIns="0" bIns="0" rtlCol="0" anchor="ctr"/>
           <a:lstStyle/>
           <a:p>
-            <a:pPr indent="0" marL="0">
+            <a:pPr marL="0" indent="0">
               <a:buNone/>
             </a:pPr>
             <a:r>
@@ -4453,7 +4214,7 @@
           <a:bodyPr wrap="square" lIns="0" tIns="0" rIns="0" bIns="0" rtlCol="0" anchor="ctr"/>
           <a:lstStyle/>
           <a:p>
-            <a:pPr indent="0" marL="0">
+            <a:pPr marL="0" indent="0">
               <a:buNone/>
             </a:pPr>
             <a:r>
@@ -4517,7 +4278,7 @@
           <a:bodyPr wrap="square" lIns="0" tIns="0" rIns="0" bIns="0" rtlCol="0" anchor="ctr"/>
           <a:lstStyle/>
           <a:p>
-            <a:pPr indent="0" marL="0">
+            <a:pPr marL="0" indent="0">
               <a:buNone/>
             </a:pPr>
             <a:r>
@@ -4551,6 +4312,7 @@
         <a:solidFill>
           <a:srgbClr val="FFFFFF"/>
         </a:solidFill>
+        <a:effectLst/>
       </p:bgPr>
     </p:bg>
     <p:spTree>
@@ -4638,7 +4400,7 @@
           <a:bodyPr wrap="square" lIns="0" tIns="0" rIns="0" bIns="0" rtlCol="0" anchor="ctr"/>
           <a:lstStyle/>
           <a:p>
-            <a:pPr indent="0" marL="0">
+            <a:pPr marL="0" indent="0">
               <a:buNone/>
             </a:pPr>
             <a:r>
@@ -4677,7 +4439,7 @@
           <a:bodyPr wrap="square" lIns="0" tIns="0" rIns="0" bIns="0" rtlCol="0" anchor="ctr"/>
           <a:lstStyle/>
           <a:p>
-            <a:pPr indent="0" marL="0">
+            <a:pPr marL="0" indent="0">
               <a:buNone/>
             </a:pPr>
             <a:r>
@@ -4716,7 +4478,7 @@
           <a:bodyPr wrap="square" lIns="0" tIns="0" rIns="0" bIns="0" rtlCol="0" anchor="ctr"/>
           <a:lstStyle/>
           <a:p>
-            <a:pPr indent="0" marL="0">
+            <a:pPr marL="0" indent="0">
               <a:buNone/>
             </a:pPr>
             <a:r>
@@ -4780,7 +4542,7 @@
           <a:bodyPr wrap="square" lIns="0" tIns="0" rIns="0" bIns="0" rtlCol="0" anchor="ctr"/>
           <a:lstStyle/>
           <a:p>
-            <a:pPr indent="0" marL="0">
+            <a:pPr marL="0" indent="0">
               <a:buNone/>
             </a:pPr>
             <a:r>
@@ -4844,7 +4606,7 @@
           <a:bodyPr wrap="square" lIns="0" tIns="0" rIns="0" bIns="0" rtlCol="0" anchor="ctr"/>
           <a:lstStyle/>
           <a:p>
-            <a:pPr indent="0" marL="0">
+            <a:pPr marL="0" indent="0">
               <a:buNone/>
             </a:pPr>
             <a:r>
@@ -4908,7 +4670,7 @@
           <a:bodyPr wrap="square" lIns="0" tIns="0" rIns="0" bIns="0" rtlCol="0" anchor="ctr"/>
           <a:lstStyle/>
           <a:p>
-            <a:pPr indent="0" marL="0">
+            <a:pPr marL="0" indent="0">
               <a:buNone/>
             </a:pPr>
             <a:r>
@@ -4972,7 +4734,7 @@
           <a:bodyPr wrap="square" lIns="0" tIns="0" rIns="0" bIns="0" rtlCol="0" anchor="ctr"/>
           <a:lstStyle/>
           <a:p>
-            <a:pPr indent="0" marL="0">
+            <a:pPr marL="0" indent="0">
               <a:buNone/>
             </a:pPr>
             <a:r>
@@ -5036,7 +4798,7 @@
           <a:bodyPr wrap="square" lIns="0" tIns="0" rIns="0" bIns="0" rtlCol="0" anchor="ctr"/>
           <a:lstStyle/>
           <a:p>
-            <a:pPr indent="0" marL="0">
+            <a:pPr marL="0" indent="0">
               <a:buNone/>
             </a:pPr>
             <a:r>
@@ -5100,7 +4862,7 @@
           <a:bodyPr wrap="square" lIns="0" tIns="0" rIns="0" bIns="0" rtlCol="0" anchor="ctr"/>
           <a:lstStyle/>
           <a:p>
-            <a:pPr indent="0" marL="0">
+            <a:pPr marL="0" indent="0">
               <a:buNone/>
             </a:pPr>
             <a:r>
@@ -5164,7 +4926,7 @@
           <a:bodyPr wrap="square" lIns="0" tIns="0" rIns="0" bIns="0" rtlCol="0" anchor="ctr"/>
           <a:lstStyle/>
           <a:p>
-            <a:pPr indent="0" marL="0">
+            <a:pPr marL="0" indent="0">
               <a:buNone/>
             </a:pPr>
             <a:r>
@@ -5228,7 +4990,7 @@
           <a:bodyPr wrap="square" lIns="0" tIns="0" rIns="0" bIns="0" rtlCol="0" anchor="ctr"/>
           <a:lstStyle/>
           <a:p>
-            <a:pPr indent="0" marL="0">
+            <a:pPr marL="0" indent="0">
               <a:buNone/>
             </a:pPr>
             <a:r>
@@ -5442,7 +5204,7 @@
           <a:bodyPr wrap="square" lIns="0" tIns="0" rIns="0" bIns="0" rtlCol="0" anchor="ctr"/>
           <a:lstStyle/>
           <a:p>
-            <a:pPr indent="0" marL="0">
+            <a:pPr marL="0" indent="0">
               <a:buNone/>
             </a:pPr>
             <a:r>
@@ -5481,7 +5243,7 @@
           <a:bodyPr wrap="square" lIns="0" tIns="0" rIns="0" bIns="0" rtlCol="0" anchor="ctr"/>
           <a:lstStyle/>
           <a:p>
-            <a:pPr indent="0" marL="0">
+            <a:pPr marL="0" indent="0">
               <a:buNone/>
             </a:pPr>
             <a:r>
@@ -5520,7 +5282,7 @@
           <a:bodyPr wrap="square" lIns="0" tIns="0" rIns="0" bIns="0" rtlCol="0" anchor="ctr"/>
           <a:lstStyle/>
           <a:p>
-            <a:pPr indent="0" marL="0">
+            <a:pPr marL="0" indent="0">
               <a:buNone/>
             </a:pPr>
             <a:r>
@@ -5559,7 +5321,7 @@
           <a:bodyPr wrap="square" lIns="0" tIns="0" rIns="0" bIns="0" rtlCol="0" anchor="ctr"/>
           <a:lstStyle/>
           <a:p>
-            <a:pPr indent="0" marL="0">
+            <a:pPr marL="0" indent="0">
               <a:buNone/>
             </a:pPr>
             <a:r>
@@ -5598,7 +5360,7 @@
           <a:bodyPr wrap="square" lIns="0" tIns="0" rIns="0" bIns="0" rtlCol="0" anchor="ctr"/>
           <a:lstStyle/>
           <a:p>
-            <a:pPr indent="0" marL="0">
+            <a:pPr marL="0" indent="0">
               <a:buNone/>
             </a:pPr>
             <a:r>
@@ -5637,7 +5399,7 @@
           <a:bodyPr wrap="square" lIns="0" tIns="0" rIns="0" bIns="0" rtlCol="0" anchor="ctr"/>
           <a:lstStyle/>
           <a:p>
-            <a:pPr indent="0" marL="0">
+            <a:pPr marL="0" indent="0">
               <a:buNone/>
             </a:pPr>
             <a:r>
@@ -5676,7 +5438,7 @@
           <a:bodyPr wrap="square" lIns="0" tIns="0" rIns="0" bIns="0" rtlCol="0" anchor="ctr"/>
           <a:lstStyle/>
           <a:p>
-            <a:pPr indent="0" marL="0">
+            <a:pPr marL="0" indent="0">
               <a:buNone/>
             </a:pPr>
             <a:r>
@@ -5890,7 +5652,7 @@
           <a:bodyPr wrap="square" lIns="0" tIns="0" rIns="0" bIns="0" rtlCol="0" anchor="ctr"/>
           <a:lstStyle/>
           <a:p>
-            <a:pPr indent="0" marL="0">
+            <a:pPr marL="0" indent="0">
               <a:buNone/>
             </a:pPr>
             <a:r>
@@ -5929,7 +5691,7 @@
           <a:bodyPr wrap="square" lIns="0" tIns="0" rIns="0" bIns="0" rtlCol="0" anchor="ctr"/>
           <a:lstStyle/>
           <a:p>
-            <a:pPr indent="0" marL="0">
+            <a:pPr marL="0" indent="0">
               <a:buNone/>
             </a:pPr>
             <a:r>
@@ -5968,7 +5730,7 @@
           <a:bodyPr wrap="square" lIns="0" tIns="0" rIns="0" bIns="0" rtlCol="0" anchor="ctr"/>
           <a:lstStyle/>
           <a:p>
-            <a:pPr indent="0" marL="0">
+            <a:pPr marL="0" indent="0">
               <a:buNone/>
             </a:pPr>
             <a:r>
@@ -6007,7 +5769,7 @@
           <a:bodyPr wrap="square" lIns="0" tIns="0" rIns="0" bIns="0" rtlCol="0" anchor="ctr"/>
           <a:lstStyle/>
           <a:p>
-            <a:pPr indent="0" marL="0">
+            <a:pPr marL="0" indent="0">
               <a:buNone/>
             </a:pPr>
             <a:r>
@@ -6046,7 +5808,7 @@
           <a:bodyPr wrap="square" lIns="0" tIns="0" rIns="0" bIns="0" rtlCol="0" anchor="ctr"/>
           <a:lstStyle/>
           <a:p>
-            <a:pPr indent="0" marL="0">
+            <a:pPr marL="0" indent="0">
               <a:buNone/>
             </a:pPr>
             <a:r>
@@ -6085,7 +5847,7 @@
           <a:bodyPr wrap="square" lIns="0" tIns="0" rIns="0" bIns="0" rtlCol="0" anchor="ctr"/>
           <a:lstStyle/>
           <a:p>
-            <a:pPr indent="0" marL="0">
+            <a:pPr marL="0" indent="0">
               <a:buNone/>
             </a:pPr>
             <a:r>
@@ -6124,7 +5886,7 @@
           <a:bodyPr wrap="square" lIns="0" tIns="0" rIns="0" bIns="0" rtlCol="0" anchor="ctr"/>
           <a:lstStyle/>
           <a:p>
-            <a:pPr indent="0" marL="0">
+            <a:pPr marL="0" indent="0">
               <a:buNone/>
             </a:pPr>
             <a:r>
@@ -6338,7 +6100,7 @@
           <a:bodyPr wrap="square" lIns="0" tIns="0" rIns="0" bIns="0" rtlCol="0" anchor="ctr"/>
           <a:lstStyle/>
           <a:p>
-            <a:pPr indent="0" marL="0">
+            <a:pPr marL="0" indent="0">
               <a:buNone/>
             </a:pPr>
             <a:r>
@@ -6377,7 +6139,7 @@
           <a:bodyPr wrap="square" lIns="0" tIns="0" rIns="0" bIns="0" rtlCol="0" anchor="ctr"/>
           <a:lstStyle/>
           <a:p>
-            <a:pPr indent="0" marL="0">
+            <a:pPr marL="0" indent="0">
               <a:buNone/>
             </a:pPr>
             <a:r>
@@ -6416,7 +6178,7 @@
           <a:bodyPr wrap="square" lIns="0" tIns="0" rIns="0" bIns="0" rtlCol="0" anchor="ctr"/>
           <a:lstStyle/>
           <a:p>
-            <a:pPr indent="0" marL="0">
+            <a:pPr marL="0" indent="0">
               <a:buNone/>
             </a:pPr>
             <a:r>
@@ -6455,7 +6217,7 @@
           <a:bodyPr wrap="square" lIns="0" tIns="0" rIns="0" bIns="0" rtlCol="0" anchor="ctr"/>
           <a:lstStyle/>
           <a:p>
-            <a:pPr indent="0" marL="0">
+            <a:pPr marL="0" indent="0">
               <a:buNone/>
             </a:pPr>
             <a:r>
@@ -6494,7 +6256,7 @@
           <a:bodyPr wrap="square" lIns="0" tIns="0" rIns="0" bIns="0" rtlCol="0" anchor="ctr"/>
           <a:lstStyle/>
           <a:p>
-            <a:pPr indent="0" marL="0">
+            <a:pPr marL="0" indent="0">
               <a:buNone/>
             </a:pPr>
             <a:r>
@@ -6533,7 +6295,7 @@
           <a:bodyPr wrap="square" lIns="0" tIns="0" rIns="0" bIns="0" rtlCol="0" anchor="ctr"/>
           <a:lstStyle/>
           <a:p>
-            <a:pPr indent="0" marL="0">
+            <a:pPr marL="0" indent="0">
               <a:buNone/>
             </a:pPr>
             <a:r>
@@ -6572,7 +6334,7 @@
           <a:bodyPr wrap="square" lIns="0" tIns="0" rIns="0" bIns="0" rtlCol="0" anchor="ctr"/>
           <a:lstStyle/>
           <a:p>
-            <a:pPr indent="0" marL="0">
+            <a:pPr marL="0" indent="0">
               <a:buNone/>
             </a:pPr>
             <a:r>
@@ -6786,7 +6548,7 @@
           <a:bodyPr wrap="square" lIns="0" tIns="0" rIns="0" bIns="0" rtlCol="0" anchor="ctr"/>
           <a:lstStyle/>
           <a:p>
-            <a:pPr indent="0" marL="0">
+            <a:pPr marL="0" indent="0">
               <a:buNone/>
             </a:pPr>
             <a:r>
@@ -6825,7 +6587,7 @@
           <a:bodyPr wrap="square" lIns="0" tIns="0" rIns="0" bIns="0" rtlCol="0" anchor="ctr"/>
           <a:lstStyle/>
           <a:p>
-            <a:pPr indent="0" marL="0">
+            <a:pPr marL="0" indent="0">
               <a:buNone/>
             </a:pPr>
             <a:r>
@@ -6864,7 +6626,7 @@
           <a:bodyPr wrap="square" lIns="0" tIns="0" rIns="0" bIns="0" rtlCol="0" anchor="ctr"/>
           <a:lstStyle/>
           <a:p>
-            <a:pPr indent="0" marL="0">
+            <a:pPr marL="0" indent="0">
               <a:buNone/>
             </a:pPr>
             <a:r>
@@ -6903,7 +6665,7 @@
           <a:bodyPr wrap="square" lIns="0" tIns="0" rIns="0" bIns="0" rtlCol="0" anchor="ctr"/>
           <a:lstStyle/>
           <a:p>
-            <a:pPr indent="0" marL="0">
+            <a:pPr marL="0" indent="0">
               <a:buNone/>
             </a:pPr>
             <a:r>
@@ -6942,7 +6704,7 @@
           <a:bodyPr wrap="square" lIns="0" tIns="0" rIns="0" bIns="0" rtlCol="0" anchor="ctr"/>
           <a:lstStyle/>
           <a:p>
-            <a:pPr indent="0" marL="0">
+            <a:pPr marL="0" indent="0">
               <a:buNone/>
             </a:pPr>
             <a:r>
@@ -6981,7 +6743,7 @@
           <a:bodyPr wrap="square" lIns="0" tIns="0" rIns="0" bIns="0" rtlCol="0" anchor="ctr"/>
           <a:lstStyle/>
           <a:p>
-            <a:pPr indent="0" marL="0">
+            <a:pPr marL="0" indent="0">
               <a:buNone/>
             </a:pPr>
             <a:r>
@@ -7020,7 +6782,7 @@
           <a:bodyPr wrap="square" lIns="0" tIns="0" rIns="0" bIns="0" rtlCol="0" anchor="ctr"/>
           <a:lstStyle/>
           <a:p>
-            <a:pPr indent="0" marL="0">
+            <a:pPr marL="0" indent="0">
               <a:buNone/>
             </a:pPr>
             <a:r>
@@ -7234,7 +6996,7 @@
           <a:bodyPr wrap="square" lIns="0" tIns="0" rIns="0" bIns="0" rtlCol="0" anchor="ctr"/>
           <a:lstStyle/>
           <a:p>
-            <a:pPr indent="0" marL="0">
+            <a:pPr marL="0" indent="0">
               <a:buNone/>
             </a:pPr>
             <a:r>
@@ -7273,7 +7035,7 @@
           <a:bodyPr wrap="square" lIns="0" tIns="0" rIns="0" bIns="0" rtlCol="0" anchor="ctr"/>
           <a:lstStyle/>
           <a:p>
-            <a:pPr indent="0" marL="0">
+            <a:pPr marL="0" indent="0">
               <a:buNone/>
             </a:pPr>
             <a:r>
@@ -7312,7 +7074,7 @@
           <a:bodyPr wrap="square" lIns="0" tIns="0" rIns="0" bIns="0" rtlCol="0" anchor="ctr"/>
           <a:lstStyle/>
           <a:p>
-            <a:pPr indent="0" marL="0">
+            <a:pPr marL="0" indent="0">
               <a:buNone/>
             </a:pPr>
             <a:r>
@@ -7351,7 +7113,7 @@
           <a:bodyPr wrap="square" lIns="0" tIns="0" rIns="0" bIns="0" rtlCol="0" anchor="ctr"/>
           <a:lstStyle/>
           <a:p>
-            <a:pPr indent="0" marL="0">
+            <a:pPr marL="0" indent="0">
               <a:buNone/>
             </a:pPr>
             <a:r>
@@ -7390,7 +7152,7 @@
           <a:bodyPr wrap="square" lIns="0" tIns="0" rIns="0" bIns="0" rtlCol="0" anchor="ctr"/>
           <a:lstStyle/>
           <a:p>
-            <a:pPr indent="0" marL="0">
+            <a:pPr marL="0" indent="0">
               <a:buNone/>
             </a:pPr>
             <a:r>
@@ -7429,7 +7191,7 @@
           <a:bodyPr wrap="square" lIns="0" tIns="0" rIns="0" bIns="0" rtlCol="0" anchor="ctr"/>
           <a:lstStyle/>
           <a:p>
-            <a:pPr indent="0" marL="0">
+            <a:pPr marL="0" indent="0">
               <a:buNone/>
             </a:pPr>
             <a:r>
@@ -7468,7 +7230,7 @@
           <a:bodyPr wrap="square" lIns="0" tIns="0" rIns="0" bIns="0" rtlCol="0" anchor="ctr"/>
           <a:lstStyle/>
           <a:p>
-            <a:pPr indent="0" marL="0">
+            <a:pPr marL="0" indent="0">
               <a:buNone/>
             </a:pPr>
             <a:r>
@@ -7532,7 +7294,7 @@
           <a:bodyPr wrap="square" lIns="0" tIns="0" rIns="0" bIns="0" rtlCol="0" anchor="ctr"/>
           <a:lstStyle/>
           <a:p>
-            <a:pPr indent="0" marL="0">
+            <a:pPr marL="0" indent="0">
               <a:buNone/>
             </a:pPr>
             <a:r>
@@ -7596,7 +7358,7 @@
           <a:bodyPr wrap="square" lIns="0" tIns="0" rIns="0" bIns="0" rtlCol="0" anchor="ctr"/>
           <a:lstStyle/>
           <a:p>
-            <a:pPr indent="0" marL="0">
+            <a:pPr marL="0" indent="0">
               <a:buNone/>
             </a:pPr>
             <a:r>
@@ -7630,6 +7392,7 @@
         <a:solidFill>
           <a:srgbClr val="F7FBFF"/>
         </a:solidFill>
+        <a:effectLst/>
       </p:bgPr>
     </p:bg>
     <p:spTree>
@@ -7692,7 +7455,7 @@
           <a:bodyPr wrap="square" lIns="0" tIns="0" rIns="0" bIns="0" rtlCol="0" anchor="ctr"/>
           <a:lstStyle/>
           <a:p>
-            <a:pPr indent="0" marL="0">
+            <a:pPr marL="0" indent="0">
               <a:buNone/>
             </a:pPr>
             <a:r>
@@ -7731,7 +7494,7 @@
           <a:bodyPr wrap="square" lIns="0" tIns="0" rIns="0" bIns="0" rtlCol="0" anchor="ctr"/>
           <a:lstStyle/>
           <a:p>
-            <a:pPr indent="0" marL="0">
+            <a:pPr marL="0" indent="0">
               <a:buNone/>
             </a:pPr>
             <a:r>
@@ -7770,7 +7533,7 @@
           <a:bodyPr wrap="square" lIns="0" tIns="0" rIns="0" bIns="0" rtlCol="0" anchor="ctr"/>
           <a:lstStyle/>
           <a:p>
-            <a:pPr indent="0" marL="0">
+            <a:pPr marL="0" indent="0">
               <a:buNone/>
             </a:pPr>
             <a:r>
@@ -7812,7 +7575,7 @@
             <a:prstDash val="solid"/>
           </a:ln>
           <a:effectLst>
-            <a:outerShdw sx="100000" sy="100000" kx="0" ky="0" algn="bl" rotWithShape="0" blurRad="101600" dist="38100" dir="8100000">
+            <a:outerShdw blurRad="101600" dist="38100" dir="8100000" algn="bl" rotWithShape="0">
               <a:srgbClr val="9EAFC0">
                 <a:alpha val="13000"/>
               </a:srgbClr>
@@ -7866,7 +7629,7 @@
           <a:bodyPr wrap="square" lIns="0" tIns="0" rIns="0" bIns="0" rtlCol="0" anchor="ctr"/>
           <a:lstStyle/>
           <a:p>
-            <a:pPr indent="0" marL="0">
+            <a:pPr marL="0" indent="0">
               <a:buNone/>
             </a:pPr>
             <a:r>
@@ -7930,7 +7693,7 @@
           <a:bodyPr wrap="square" lIns="0" tIns="0" rIns="0" bIns="0" rtlCol="0" anchor="ctr"/>
           <a:lstStyle/>
           <a:p>
-            <a:pPr indent="0" marL="0">
+            <a:pPr marL="0" indent="0">
               <a:buNone/>
             </a:pPr>
             <a:r>
@@ -7969,7 +7732,7 @@
           <a:bodyPr wrap="square" lIns="0" tIns="0" rIns="0" bIns="0" rtlCol="0" anchor="ctr"/>
           <a:lstStyle/>
           <a:p>
-            <a:pPr indent="0" marL="0">
+            <a:pPr marL="0" indent="0">
               <a:buNone/>
             </a:pPr>
             <a:r>
@@ -8033,7 +7796,7 @@
           <a:bodyPr wrap="square" lIns="0" tIns="0" rIns="0" bIns="0" rtlCol="0" anchor="ctr"/>
           <a:lstStyle/>
           <a:p>
-            <a:pPr indent="0" marL="0">
+            <a:pPr marL="0" indent="0">
               <a:buNone/>
             </a:pPr>
             <a:r>
@@ -8072,7 +7835,7 @@
           <a:bodyPr wrap="square" lIns="0" tIns="0" rIns="0" bIns="0" rtlCol="0" anchor="ctr"/>
           <a:lstStyle/>
           <a:p>
-            <a:pPr indent="0" marL="0">
+            <a:pPr marL="0" indent="0">
               <a:buNone/>
             </a:pPr>
             <a:r>
@@ -8136,7 +7899,7 @@
           <a:bodyPr wrap="square" lIns="0" tIns="0" rIns="0" bIns="0" rtlCol="0" anchor="ctr"/>
           <a:lstStyle/>
           <a:p>
-            <a:pPr indent="0" marL="0">
+            <a:pPr marL="0" indent="0">
               <a:buNone/>
             </a:pPr>
             <a:r>
@@ -8175,7 +7938,7 @@
           <a:bodyPr wrap="square" lIns="0" tIns="0" rIns="0" bIns="0" rtlCol="0" anchor="ctr"/>
           <a:lstStyle/>
           <a:p>
-            <a:pPr indent="0" marL="0">
+            <a:pPr marL="0" indent="0">
               <a:buNone/>
             </a:pPr>
             <a:r>
@@ -8239,7 +8002,7 @@
           <a:bodyPr wrap="square" lIns="0" tIns="0" rIns="0" bIns="0" rtlCol="0" anchor="ctr"/>
           <a:lstStyle/>
           <a:p>
-            <a:pPr indent="0" marL="0">
+            <a:pPr marL="0" indent="0">
               <a:buNone/>
             </a:pPr>
             <a:r>
@@ -8278,7 +8041,7 @@
           <a:bodyPr wrap="square" lIns="0" tIns="0" rIns="0" bIns="0" rtlCol="0" anchor="ctr"/>
           <a:lstStyle/>
           <a:p>
-            <a:pPr indent="0" marL="0">
+            <a:pPr marL="0" indent="0">
               <a:buNone/>
             </a:pPr>
             <a:r>
@@ -8342,7 +8105,7 @@
           <a:bodyPr wrap="square" lIns="0" tIns="0" rIns="0" bIns="0" rtlCol="0" anchor="ctr"/>
           <a:lstStyle/>
           <a:p>
-            <a:pPr indent="0" marL="0">
+            <a:pPr marL="0" indent="0">
               <a:buNone/>
             </a:pPr>
             <a:r>
@@ -8381,7 +8144,7 @@
           <a:bodyPr wrap="square" lIns="0" tIns="0" rIns="0" bIns="0" rtlCol="0" anchor="ctr"/>
           <a:lstStyle/>
           <a:p>
-            <a:pPr indent="0" marL="0">
+            <a:pPr marL="0" indent="0">
               <a:buNone/>
             </a:pPr>
             <a:r>
@@ -8445,7 +8208,7 @@
           <a:bodyPr wrap="square" lIns="0" tIns="0" rIns="0" bIns="0" rtlCol="0" anchor="ctr"/>
           <a:lstStyle/>
           <a:p>
-            <a:pPr indent="0" marL="0">
+            <a:pPr marL="0" indent="0">
               <a:buNone/>
             </a:pPr>
             <a:r>
@@ -8484,7 +8247,7 @@
           <a:bodyPr wrap="square" lIns="0" tIns="0" rIns="0" bIns="0" rtlCol="0" anchor="ctr"/>
           <a:lstStyle/>
           <a:p>
-            <a:pPr indent="0" marL="0">
+            <a:pPr marL="0" indent="0">
               <a:buNone/>
             </a:pPr>
             <a:r>
@@ -8526,7 +8289,7 @@
             <a:prstDash val="solid"/>
           </a:ln>
           <a:effectLst>
-            <a:outerShdw sx="100000" sy="100000" kx="0" ky="0" algn="bl" rotWithShape="0" blurRad="101600" dist="38100" dir="8100000">
+            <a:outerShdw blurRad="101600" dist="38100" dir="8100000" algn="bl" rotWithShape="0">
               <a:srgbClr val="9EAFC0">
                 <a:alpha val="13000"/>
               </a:srgbClr>
@@ -8580,7 +8343,7 @@
           <a:bodyPr wrap="square" lIns="0" tIns="0" rIns="0" bIns="0" rtlCol="0" anchor="ctr"/>
           <a:lstStyle/>
           <a:p>
-            <a:pPr indent="0" marL="0">
+            <a:pPr marL="0" indent="0">
               <a:buNone/>
             </a:pPr>
             <a:r>
@@ -8644,7 +8407,7 @@
           <a:bodyPr wrap="square" lIns="0" tIns="0" rIns="0" bIns="0" rtlCol="0" anchor="ctr"/>
           <a:lstStyle/>
           <a:p>
-            <a:pPr indent="0" marL="0">
+            <a:pPr marL="0" indent="0">
               <a:buNone/>
             </a:pPr>
             <a:r>
@@ -8708,7 +8471,7 @@
           <a:bodyPr wrap="square" lIns="0" tIns="0" rIns="0" bIns="0" rtlCol="0" anchor="ctr"/>
           <a:lstStyle/>
           <a:p>
-            <a:pPr indent="0" marL="0">
+            <a:pPr marL="0" indent="0">
               <a:buNone/>
             </a:pPr>
             <a:r>
@@ -8772,7 +8535,7 @@
           <a:bodyPr wrap="square" lIns="0" tIns="0" rIns="0" bIns="0" rtlCol="0" anchor="ctr"/>
           <a:lstStyle/>
           <a:p>
-            <a:pPr indent="0" marL="0">
+            <a:pPr marL="0" indent="0">
               <a:buNone/>
             </a:pPr>
             <a:r>
@@ -8836,7 +8599,7 @@
           <a:bodyPr wrap="square" lIns="0" tIns="0" rIns="0" bIns="0" rtlCol="0" anchor="ctr"/>
           <a:lstStyle/>
           <a:p>
-            <a:pPr indent="0" marL="0">
+            <a:pPr marL="0" indent="0">
               <a:buNone/>
             </a:pPr>
             <a:r>
@@ -8900,7 +8663,7 @@
           <a:bodyPr wrap="square" lIns="0" tIns="0" rIns="0" bIns="0" rtlCol="0" anchor="ctr"/>
           <a:lstStyle/>
           <a:p>
-            <a:pPr indent="0" marL="0">
+            <a:pPr marL="0" indent="0">
               <a:buNone/>
             </a:pPr>
             <a:r>
@@ -8964,7 +8727,7 @@
           <a:bodyPr wrap="square" lIns="0" tIns="0" rIns="0" bIns="0" rtlCol="0" anchor="ctr"/>
           <a:lstStyle/>
           <a:p>
-            <a:pPr indent="0" marL="0">
+            <a:pPr marL="0" indent="0">
               <a:buNone/>
             </a:pPr>
             <a:r>
@@ -9028,7 +8791,7 @@
           <a:bodyPr wrap="square" lIns="0" tIns="0" rIns="0" bIns="0" rtlCol="0" anchor="ctr"/>
           <a:lstStyle/>
           <a:p>
-            <a:pPr indent="0" marL="0">
+            <a:pPr marL="0" indent="0">
               <a:buNone/>
             </a:pPr>
             <a:r>
@@ -9092,7 +8855,7 @@
           <a:bodyPr wrap="square" lIns="0" tIns="0" rIns="0" bIns="0" rtlCol="0" anchor="ctr"/>
           <a:lstStyle/>
           <a:p>
-            <a:pPr indent="0" marL="0">
+            <a:pPr marL="0" indent="0">
               <a:buNone/>
             </a:pPr>
             <a:r>
@@ -9156,7 +8919,7 @@
           <a:bodyPr wrap="square" lIns="0" tIns="0" rIns="0" bIns="0" rtlCol="0" anchor="ctr"/>
           <a:lstStyle/>
           <a:p>
-            <a:pPr indent="0" marL="0">
+            <a:pPr marL="0" indent="0">
               <a:buNone/>
             </a:pPr>
             <a:r>
@@ -9220,7 +8983,7 @@
           <a:bodyPr wrap="square" lIns="0" tIns="0" rIns="0" bIns="0" rtlCol="0" anchor="ctr"/>
           <a:lstStyle/>
           <a:p>
-            <a:pPr indent="0" marL="0">
+            <a:pPr marL="0" indent="0">
               <a:buNone/>
             </a:pPr>
             <a:r>
@@ -9284,7 +9047,7 @@
           <a:bodyPr wrap="square" lIns="0" tIns="0" rIns="0" bIns="0" rtlCol="0" anchor="ctr"/>
           <a:lstStyle/>
           <a:p>
-            <a:pPr indent="0" marL="0">
+            <a:pPr marL="0" indent="0">
               <a:buNone/>
             </a:pPr>
             <a:r>
@@ -9348,7 +9111,7 @@
           <a:bodyPr wrap="square" lIns="0" tIns="0" rIns="0" bIns="0" rtlCol="0" anchor="ctr"/>
           <a:lstStyle/>
           <a:p>
-            <a:pPr indent="0" marL="0">
+            <a:pPr marL="0" indent="0">
               <a:buNone/>
             </a:pPr>
             <a:r>
@@ -9412,7 +9175,7 @@
           <a:bodyPr wrap="square" lIns="0" tIns="0" rIns="0" bIns="0" rtlCol="0" anchor="ctr"/>
           <a:lstStyle/>
           <a:p>
-            <a:pPr indent="0" marL="0">
+            <a:pPr marL="0" indent="0">
               <a:buNone/>
             </a:pPr>
             <a:r>
@@ -9476,7 +9239,7 @@
           <a:bodyPr wrap="square" lIns="0" tIns="0" rIns="0" bIns="0" rtlCol="0" anchor="ctr"/>
           <a:lstStyle/>
           <a:p>
-            <a:pPr indent="0" marL="0">
+            <a:pPr marL="0" indent="0">
               <a:buNone/>
             </a:pPr>
             <a:r>
@@ -9540,7 +9303,7 @@
           <a:bodyPr wrap="square" lIns="0" tIns="0" rIns="0" bIns="0" rtlCol="0" anchor="ctr"/>
           <a:lstStyle/>
           <a:p>
-            <a:pPr indent="0" marL="0">
+            <a:pPr marL="0" indent="0">
               <a:buNone/>
             </a:pPr>
             <a:r>
@@ -9604,7 +9367,7 @@
           <a:bodyPr wrap="square" lIns="0" tIns="0" rIns="0" bIns="0" rtlCol="0" anchor="ctr"/>
           <a:lstStyle/>
           <a:p>
-            <a:pPr indent="0" marL="0">
+            <a:pPr marL="0" indent="0">
               <a:buNone/>
             </a:pPr>
             <a:r>
@@ -9668,7 +9431,7 @@
           <a:bodyPr wrap="square" lIns="0" tIns="0" rIns="0" bIns="0" rtlCol="0" anchor="ctr"/>
           <a:lstStyle/>
           <a:p>
-            <a:pPr indent="0" marL="0">
+            <a:pPr marL="0" indent="0">
               <a:buNone/>
             </a:pPr>
             <a:r>
@@ -9707,7 +9470,7 @@
           <a:bodyPr wrap="square" lIns="0" tIns="0" rIns="0" bIns="0" rtlCol="0" anchor="ctr"/>
           <a:lstStyle/>
           <a:p>
-            <a:pPr indent="0" marL="0">
+            <a:pPr marL="0" indent="0">
               <a:lnSpc>
                 <a:spcPct val="130000"/>
               </a:lnSpc>
@@ -9774,7 +9537,7 @@
           <a:bodyPr wrap="square" lIns="0" tIns="0" rIns="0" bIns="0" rtlCol="0" anchor="ctr"/>
           <a:lstStyle/>
           <a:p>
-            <a:pPr indent="0" marL="0">
+            <a:pPr marL="0" indent="0">
               <a:buNone/>
             </a:pPr>
             <a:r>
@@ -9808,6 +9571,7 @@
         <a:solidFill>
           <a:srgbClr val="1A2B3C"/>
         </a:solidFill>
+        <a:effectLst/>
       </p:bgPr>
     </p:bg>
     <p:spTree>
@@ -9860,7 +9624,7 @@
             <a:off x="237744" y="137160"/>
             <a:ext cx="155448" cy="155448"/>
           </a:xfrm>
-          <a:prstGeom prst="oval">
+          <a:prstGeom prst="line">
             <a:avLst/>
           </a:prstGeom>
           <a:solidFill>
@@ -9885,7 +9649,7 @@
             <a:off x="512064" y="137160"/>
             <a:ext cx="155448" cy="155448"/>
           </a:xfrm>
-          <a:prstGeom prst="oval">
+          <a:prstGeom prst="line">
             <a:avLst/>
           </a:prstGeom>
           <a:solidFill>
@@ -9910,7 +9674,7 @@
             <a:off x="786384" y="137160"/>
             <a:ext cx="155448" cy="155448"/>
           </a:xfrm>
-          <a:prstGeom prst="oval">
+          <a:prstGeom prst="line">
             <a:avLst/>
           </a:prstGeom>
           <a:solidFill>
@@ -9945,7 +9709,7 @@
           <a:bodyPr wrap="square" lIns="0" tIns="0" rIns="0" bIns="0" rtlCol="0" anchor="ctr"/>
           <a:lstStyle/>
           <a:p>
-            <a:pPr algn="ctr" indent="0" marL="0">
+            <a:pPr marL="0" indent="0" algn="ctr">
               <a:buNone/>
             </a:pPr>
             <a:r>
@@ -10034,7 +9798,7 @@
           <a:bodyPr wrap="square" lIns="0" tIns="0" rIns="0" bIns="0" rtlCol="0" anchor="ctr"/>
           <a:lstStyle/>
           <a:p>
-            <a:pPr indent="0" marL="0">
+            <a:pPr marL="0" indent="0">
               <a:buNone/>
             </a:pPr>
             <a:r>
@@ -10073,7 +9837,7 @@
           <a:bodyPr wrap="square" lIns="0" tIns="0" rIns="0" bIns="0" rtlCol="0" anchor="ctr"/>
           <a:lstStyle/>
           <a:p>
-            <a:pPr indent="0" marL="0">
+            <a:pPr marL="0" indent="0">
               <a:buNone/>
             </a:pPr>
             <a:r>
@@ -10112,7 +9876,7 @@
           <a:bodyPr wrap="square" lIns="0" tIns="0" rIns="0" bIns="0" rtlCol="0" anchor="ctr"/>
           <a:lstStyle/>
           <a:p>
-            <a:pPr indent="0" marL="0">
+            <a:pPr marL="0" indent="0">
               <a:buNone/>
             </a:pPr>
             <a:r>
@@ -10151,7 +9915,7 @@
           <a:bodyPr wrap="square" lIns="0" tIns="0" rIns="0" bIns="0" rtlCol="0" anchor="ctr"/>
           <a:lstStyle/>
           <a:p>
-            <a:pPr indent="0" marL="0">
+            <a:pPr marL="0" indent="0">
               <a:buNone/>
             </a:pPr>
             <a:r>
@@ -10190,7 +9954,7 @@
           <a:bodyPr wrap="square" lIns="0" tIns="0" rIns="0" bIns="0" rtlCol="0" anchor="ctr"/>
           <a:lstStyle/>
           <a:p>
-            <a:pPr indent="0" marL="0">
+            <a:pPr marL="0" indent="0">
               <a:buNone/>
             </a:pPr>
             <a:r>
@@ -10229,7 +9993,7 @@
           <a:bodyPr wrap="square" lIns="0" tIns="0" rIns="0" bIns="0" rtlCol="0" anchor="ctr"/>
           <a:lstStyle/>
           <a:p>
-            <a:pPr indent="0" marL="0">
+            <a:pPr marL="0" indent="0">
               <a:buNone/>
             </a:pPr>
             <a:r>
@@ -10268,7 +10032,7 @@
           <a:bodyPr wrap="square" lIns="0" tIns="0" rIns="0" bIns="0" rtlCol="0" anchor="ctr"/>
           <a:lstStyle/>
           <a:p>
-            <a:pPr indent="0" marL="0">
+            <a:pPr marL="0" indent="0">
               <a:buNone/>
             </a:pPr>
             <a:r>
@@ -10307,7 +10071,7 @@
           <a:bodyPr wrap="square" lIns="0" tIns="0" rIns="0" bIns="0" rtlCol="0" anchor="ctr"/>
           <a:lstStyle/>
           <a:p>
-            <a:pPr indent="0" marL="0">
+            <a:pPr marL="0" indent="0">
               <a:buNone/>
             </a:pPr>
             <a:r>
@@ -10396,7 +10160,7 @@
           <a:bodyPr wrap="square" lIns="0" tIns="0" rIns="0" bIns="0" rtlCol="0" anchor="ctr"/>
           <a:lstStyle/>
           <a:p>
-            <a:pPr indent="0" marL="0">
+            <a:pPr marL="0" indent="0">
               <a:buNone/>
             </a:pPr>
             <a:r>
@@ -10435,7 +10199,7 @@
           <a:bodyPr wrap="square" lIns="0" tIns="0" rIns="0" bIns="0" rtlCol="0" anchor="ctr"/>
           <a:lstStyle/>
           <a:p>
-            <a:pPr indent="0" marL="0">
+            <a:pPr marL="0" indent="0">
               <a:buNone/>
             </a:pPr>
             <a:r>
@@ -10474,7 +10238,7 @@
           <a:bodyPr wrap="square" lIns="0" tIns="0" rIns="0" bIns="0" rtlCol="0" anchor="ctr"/>
           <a:lstStyle/>
           <a:p>
-            <a:pPr indent="0" marL="0">
+            <a:pPr marL="0" indent="0">
               <a:buNone/>
             </a:pPr>
             <a:r>
@@ -10513,7 +10277,7 @@
           <a:bodyPr wrap="square" lIns="0" tIns="0" rIns="0" bIns="0" rtlCol="0" anchor="ctr"/>
           <a:lstStyle/>
           <a:p>
-            <a:pPr indent="0" marL="0">
+            <a:pPr marL="0" indent="0">
               <a:buNone/>
             </a:pPr>
             <a:r>
@@ -10552,7 +10316,7 @@
           <a:bodyPr wrap="square" lIns="0" tIns="0" rIns="0" bIns="0" rtlCol="0" anchor="ctr"/>
           <a:lstStyle/>
           <a:p>
-            <a:pPr indent="0" marL="0">
+            <a:pPr marL="0" indent="0">
               <a:buNone/>
             </a:pPr>
             <a:r>
@@ -10591,7 +10355,7 @@
           <a:bodyPr wrap="square" lIns="0" tIns="0" rIns="0" bIns="0" rtlCol="0" anchor="ctr"/>
           <a:lstStyle/>
           <a:p>
-            <a:pPr indent="0" marL="0">
+            <a:pPr marL="0" indent="0">
               <a:buNone/>
             </a:pPr>
             <a:r>
@@ -10630,7 +10394,7 @@
           <a:bodyPr wrap="square" lIns="0" tIns="0" rIns="0" bIns="0" rtlCol="0" anchor="ctr"/>
           <a:lstStyle/>
           <a:p>
-            <a:pPr indent="0" marL="0">
+            <a:pPr marL="0" indent="0">
               <a:buNone/>
             </a:pPr>
             <a:r>
@@ -10719,7 +10483,7 @@
           <a:bodyPr wrap="square" lIns="0" tIns="0" rIns="0" bIns="0" rtlCol="0" anchor="ctr"/>
           <a:lstStyle/>
           <a:p>
-            <a:pPr indent="0" marL="0">
+            <a:pPr marL="0" indent="0">
               <a:buNone/>
             </a:pPr>
             <a:r>
@@ -10758,7 +10522,7 @@
           <a:bodyPr wrap="square" lIns="0" tIns="0" rIns="0" bIns="0" rtlCol="0" anchor="ctr"/>
           <a:lstStyle/>
           <a:p>
-            <a:pPr indent="0" marL="0">
+            <a:pPr marL="0" indent="0">
               <a:buNone/>
             </a:pPr>
             <a:r>
@@ -10797,7 +10561,7 @@
           <a:bodyPr wrap="square" lIns="0" tIns="0" rIns="0" bIns="0" rtlCol="0" anchor="ctr"/>
           <a:lstStyle/>
           <a:p>
-            <a:pPr indent="0" marL="0">
+            <a:pPr marL="0" indent="0">
               <a:buNone/>
             </a:pPr>
             <a:r>
@@ -10836,7 +10600,7 @@
           <a:bodyPr wrap="square" lIns="0" tIns="0" rIns="0" bIns="0" rtlCol="0" anchor="ctr"/>
           <a:lstStyle/>
           <a:p>
-            <a:pPr indent="0" marL="0">
+            <a:pPr marL="0" indent="0">
               <a:buNone/>
             </a:pPr>
             <a:r>
@@ -10875,7 +10639,7 @@
           <a:bodyPr wrap="square" lIns="0" tIns="0" rIns="0" bIns="0" rtlCol="0" anchor="ctr"/>
           <a:lstStyle/>
           <a:p>
-            <a:pPr indent="0" marL="0">
+            <a:pPr marL="0" indent="0">
               <a:buNone/>
             </a:pPr>
             <a:r>
@@ -10914,7 +10678,7 @@
           <a:bodyPr wrap="square" lIns="0" tIns="0" rIns="0" bIns="0" rtlCol="0" anchor="ctr"/>
           <a:lstStyle/>
           <a:p>
-            <a:pPr indent="0" marL="0">
+            <a:pPr marL="0" indent="0">
               <a:buNone/>
             </a:pPr>
             <a:r>
@@ -10953,7 +10717,7 @@
           <a:bodyPr wrap="square" lIns="0" tIns="0" rIns="0" bIns="0" rtlCol="0" anchor="ctr"/>
           <a:lstStyle/>
           <a:p>
-            <a:pPr indent="0" marL="0">
+            <a:pPr marL="0" indent="0">
               <a:buNone/>
             </a:pPr>
             <a:r>
@@ -10987,6 +10751,7 @@
         <a:solidFill>
           <a:srgbClr val="FFFFFF"/>
         </a:solidFill>
+        <a:effectLst/>
       </p:bgPr>
     </p:bg>
     <p:spTree>
@@ -11064,7 +10829,7 @@
             <a:off x="91440" y="2651760"/>
             <a:ext cx="3566160" cy="3566160"/>
           </a:xfrm>
-          <a:prstGeom prst="oval">
+          <a:prstGeom prst="line">
             <a:avLst/>
           </a:prstGeom>
           <a:solidFill>
@@ -11103,7 +10868,7 @@
           <a:bodyPr wrap="square" lIns="0" tIns="0" rIns="0" bIns="0" rtlCol="0" anchor="ctr"/>
           <a:lstStyle/>
           <a:p>
-            <a:pPr indent="0" marL="0">
+            <a:pPr marL="0" indent="0">
               <a:lnSpc>
                 <a:spcPct val="108000"/>
               </a:lnSpc>
@@ -11123,7 +10888,7 @@
             <a:endParaRPr lang="en-US" sz="3200" dirty="0"/>
           </a:p>
           <a:p>
-            <a:pPr indent="0" marL="0">
+            <a:pPr marL="0" indent="0">
               <a:lnSpc>
                 <a:spcPct val="108000"/>
               </a:lnSpc>
@@ -11188,7 +10953,7 @@
           <a:bodyPr wrap="square" lIns="0" tIns="0" rIns="0" bIns="0" rtlCol="0" anchor="ctr"/>
           <a:lstStyle/>
           <a:p>
-            <a:pPr indent="0" marL="0">
+            <a:pPr marL="0" indent="0">
               <a:buNone/>
             </a:pPr>
             <a:r>
@@ -11227,7 +10992,7 @@
           <a:bodyPr wrap="square" lIns="0" tIns="0" rIns="0" bIns="0" rtlCol="0" anchor="ctr"/>
           <a:lstStyle/>
           <a:p>
-            <a:pPr indent="0" marL="0">
+            <a:pPr marL="0" indent="0">
               <a:buNone/>
             </a:pPr>
             <a:r>
@@ -11279,7 +11044,7 @@
             <a:off x="4069080" y="978408"/>
             <a:ext cx="146304" cy="146304"/>
           </a:xfrm>
-          <a:prstGeom prst="oval">
+          <a:prstGeom prst="line">
             <a:avLst/>
           </a:prstGeom>
           <a:solidFill>
@@ -11314,7 +11079,7 @@
           <a:bodyPr wrap="square" lIns="0" tIns="0" rIns="0" bIns="0" rtlCol="0" anchor="ctr"/>
           <a:lstStyle/>
           <a:p>
-            <a:pPr indent="0" marL="0">
+            <a:pPr marL="0" indent="0">
               <a:buNone/>
             </a:pPr>
             <a:r>
@@ -11343,7 +11108,7 @@
             <a:off x="4069080" y="1453896"/>
             <a:ext cx="146304" cy="146304"/>
           </a:xfrm>
-          <a:prstGeom prst="oval">
+          <a:prstGeom prst="line">
             <a:avLst/>
           </a:prstGeom>
           <a:solidFill>
@@ -11378,7 +11143,7 @@
           <a:bodyPr wrap="square" lIns="0" tIns="0" rIns="0" bIns="0" rtlCol="0" anchor="ctr"/>
           <a:lstStyle/>
           <a:p>
-            <a:pPr indent="0" marL="0">
+            <a:pPr marL="0" indent="0">
               <a:buNone/>
             </a:pPr>
             <a:r>
@@ -11407,7 +11172,7 @@
             <a:off x="4069080" y="1929384"/>
             <a:ext cx="146304" cy="146304"/>
           </a:xfrm>
-          <a:prstGeom prst="oval">
+          <a:prstGeom prst="line">
             <a:avLst/>
           </a:prstGeom>
           <a:solidFill>
@@ -11442,7 +11207,7 @@
           <a:bodyPr wrap="square" lIns="0" tIns="0" rIns="0" bIns="0" rtlCol="0" anchor="ctr"/>
           <a:lstStyle/>
           <a:p>
-            <a:pPr indent="0" marL="0">
+            <a:pPr marL="0" indent="0">
               <a:buNone/>
             </a:pPr>
             <a:r>
@@ -11471,7 +11236,7 @@
             <a:off x="4069080" y="2404872"/>
             <a:ext cx="146304" cy="146304"/>
           </a:xfrm>
-          <a:prstGeom prst="oval">
+          <a:prstGeom prst="line">
             <a:avLst/>
           </a:prstGeom>
           <a:solidFill>
@@ -11506,7 +11271,7 @@
           <a:bodyPr wrap="square" lIns="0" tIns="0" rIns="0" bIns="0" rtlCol="0" anchor="ctr"/>
           <a:lstStyle/>
           <a:p>
-            <a:pPr indent="0" marL="0">
+            <a:pPr marL="0" indent="0">
               <a:buNone/>
             </a:pPr>
             <a:r>
@@ -11535,7 +11300,7 @@
             <a:off x="4069080" y="2880360"/>
             <a:ext cx="146304" cy="146304"/>
           </a:xfrm>
-          <a:prstGeom prst="oval">
+          <a:prstGeom prst="line">
             <a:avLst/>
           </a:prstGeom>
           <a:solidFill>
@@ -11570,7 +11335,7 @@
           <a:bodyPr wrap="square" lIns="0" tIns="0" rIns="0" bIns="0" rtlCol="0" anchor="ctr"/>
           <a:lstStyle/>
           <a:p>
-            <a:pPr indent="0" marL="0">
+            <a:pPr marL="0" indent="0">
               <a:buNone/>
             </a:pPr>
             <a:r>
@@ -11599,7 +11364,7 @@
             <a:off x="4069080" y="3355848"/>
             <a:ext cx="146304" cy="146304"/>
           </a:xfrm>
-          <a:prstGeom prst="oval">
+          <a:prstGeom prst="line">
             <a:avLst/>
           </a:prstGeom>
           <a:solidFill>
@@ -11634,7 +11399,7 @@
           <a:bodyPr wrap="square" lIns="0" tIns="0" rIns="0" bIns="0" rtlCol="0" anchor="ctr"/>
           <a:lstStyle/>
           <a:p>
-            <a:pPr indent="0" marL="0">
+            <a:pPr marL="0" indent="0">
               <a:buNone/>
             </a:pPr>
             <a:r>
@@ -11698,7 +11463,7 @@
           <a:bodyPr wrap="square" lIns="0" tIns="0" rIns="0" bIns="0" rtlCol="0" anchor="ctr"/>
           <a:lstStyle/>
           <a:p>
-            <a:pPr indent="0" marL="0">
+            <a:pPr marL="0" indent="0">
               <a:buNone/>
             </a:pPr>
             <a:r>
@@ -12017,4 +11782,319 @@
     </a:ext>
   </a:extLst>
 </a:theme>
+</file>
+
+<file path=ppt/theme/theme2.xml><?xml version="1.0" encoding="utf-8"?>
+<a:theme xmlns:a="http://schemas.openxmlformats.org/drawingml/2006/main" name="Office Theme">
+  <a:themeElements>
+    <a:clrScheme name="Office">
+      <a:dk1>
+        <a:sysClr val="windowText" lastClr="000000"/>
+      </a:dk1>
+      <a:lt1>
+        <a:sysClr val="window" lastClr="FFFFFF"/>
+      </a:lt1>
+      <a:dk2>
+        <a:srgbClr val="0E2841"/>
+      </a:dk2>
+      <a:lt2>
+        <a:srgbClr val="E8E8E8"/>
+      </a:lt2>
+      <a:accent1>
+        <a:srgbClr val="156082"/>
+      </a:accent1>
+      <a:accent2>
+        <a:srgbClr val="E97132"/>
+      </a:accent2>
+      <a:accent3>
+        <a:srgbClr val="196B24"/>
+      </a:accent3>
+      <a:accent4>
+        <a:srgbClr val="0F9ED5"/>
+      </a:accent4>
+      <a:accent5>
+        <a:srgbClr val="A02B93"/>
+      </a:accent5>
+      <a:accent6>
+        <a:srgbClr val="4EA72E"/>
+      </a:accent6>
+      <a:hlink>
+        <a:srgbClr val="467886"/>
+      </a:hlink>
+      <a:folHlink>
+        <a:srgbClr val="96607D"/>
+      </a:folHlink>
+    </a:clrScheme>
+    <a:fontScheme name="Office">
+      <a:majorFont>
+        <a:latin typeface="Aptos Display" panose="02110004020202020204"/>
+        <a:ea typeface=""/>
+        <a:cs typeface=""/>
+        <a:font script="Jpan" typeface="游ゴシック Light"/>
+        <a:font script="Hang" typeface="맑은 고딕"/>
+        <a:font script="Hans" typeface="等线 Light"/>
+        <a:font script="Hant" typeface="新細明體"/>
+        <a:font script="Arab" typeface="Times New Roman"/>
+        <a:font script="Hebr" typeface="Times New Roman"/>
+        <a:font script="Thai" typeface="Angsana New"/>
+        <a:font script="Ethi" typeface="Nyala"/>
+        <a:font script="Beng" typeface="Vrinda"/>
+        <a:font script="Gujr" typeface="Shruti"/>
+        <a:font script="Khmr" typeface="MoolBoran"/>
+        <a:font script="Knda" typeface="Tunga"/>
+        <a:font script="Guru" typeface="Raavi"/>
+        <a:font script="Cans" typeface="Euphemia"/>
+        <a:font script="Cher" typeface="Plantagenet Cherokee"/>
+        <a:font script="Yiii" typeface="Microsoft Yi Baiti"/>
+        <a:font script="Tibt" typeface="Microsoft Himalaya"/>
+        <a:font script="Thaa" typeface="MV Boli"/>
+        <a:font script="Deva" typeface="Mangal"/>
+        <a:font script="Telu" typeface="Gautami"/>
+        <a:font script="Taml" typeface="Latha"/>
+        <a:font script="Syrc" typeface="Estrangelo Edessa"/>
+        <a:font script="Orya" typeface="Kalinga"/>
+        <a:font script="Mlym" typeface="Kartika"/>
+        <a:font script="Laoo" typeface="DokChampa"/>
+        <a:font script="Sinh" typeface="Iskoola Pota"/>
+        <a:font script="Mong" typeface="Mongolian Baiti"/>
+        <a:font script="Viet" typeface="Times New Roman"/>
+        <a:font script="Uigh" typeface="Microsoft Uighur"/>
+        <a:font script="Geor" typeface="Sylfaen"/>
+        <a:font script="Armn" typeface="Arial"/>
+        <a:font script="Bugi" typeface="Leelawadee UI"/>
+        <a:font script="Bopo" typeface="Microsoft JhengHei"/>
+        <a:font script="Java" typeface="Javanese Text"/>
+        <a:font script="Lisu" typeface="Segoe UI"/>
+        <a:font script="Mymr" typeface="Myanmar Text"/>
+        <a:font script="Nkoo" typeface="Ebrima"/>
+        <a:font script="Olck" typeface="Nirmala UI"/>
+        <a:font script="Osma" typeface="Ebrima"/>
+        <a:font script="Phag" typeface="Phagspa"/>
+        <a:font script="Syrn" typeface="Estrangelo Edessa"/>
+        <a:font script="Syrj" typeface="Estrangelo Edessa"/>
+        <a:font script="Syre" typeface="Estrangelo Edessa"/>
+        <a:font script="Sora" typeface="Nirmala UI"/>
+        <a:font script="Tale" typeface="Microsoft Tai Le"/>
+        <a:font script="Talu" typeface="Microsoft New Tai Lue"/>
+        <a:font script="Tfng" typeface="Ebrima"/>
+      </a:majorFont>
+      <a:minorFont>
+        <a:latin typeface="Aptos" panose="02110004020202020204"/>
+        <a:ea typeface=""/>
+        <a:cs typeface=""/>
+        <a:font script="Jpan" typeface="游ゴシック"/>
+        <a:font script="Hang" typeface="맑은 고딕"/>
+        <a:font script="Hans" typeface="等线"/>
+        <a:font script="Hant" typeface="新細明體"/>
+        <a:font script="Arab" typeface="Arial"/>
+        <a:font script="Hebr" typeface="Arial"/>
+        <a:font script="Thai" typeface="Cordia New"/>
+        <a:font script="Ethi" typeface="Nyala"/>
+        <a:font script="Beng" typeface="Vrinda"/>
+        <a:font script="Gujr" typeface="Shruti"/>
+        <a:font script="Khmr" typeface="DaunPenh"/>
+        <a:font script="Knda" typeface="Tunga"/>
+        <a:font script="Guru" typeface="Raavi"/>
+        <a:font script="Cans" typeface="Euphemia"/>
+        <a:font script="Cher" typeface="Plantagenet Cherokee"/>
+        <a:font script="Yiii" typeface="Microsoft Yi Baiti"/>
+        <a:font script="Tibt" typeface="Microsoft Himalaya"/>
+        <a:font script="Thaa" typeface="MV Boli"/>
+        <a:font script="Deva" typeface="Mangal"/>
+        <a:font script="Telu" typeface="Gautami"/>
+        <a:font script="Taml" typeface="Latha"/>
+        <a:font script="Syrc" typeface="Estrangelo Edessa"/>
+        <a:font script="Orya" typeface="Kalinga"/>
+        <a:font script="Mlym" typeface="Kartika"/>
+        <a:font script="Laoo" typeface="DokChampa"/>
+        <a:font script="Sinh" typeface="Iskoola Pota"/>
+        <a:font script="Mong" typeface="Mongolian Baiti"/>
+        <a:font script="Viet" typeface="Arial"/>
+        <a:font script="Uigh" typeface="Microsoft Uighur"/>
+        <a:font script="Geor" typeface="Sylfaen"/>
+        <a:font script="Armn" typeface="Arial"/>
+        <a:font script="Bugi" typeface="Leelawadee UI"/>
+        <a:font script="Bopo" typeface="Microsoft JhengHei"/>
+        <a:font script="Java" typeface="Javanese Text"/>
+        <a:font script="Lisu" typeface="Segoe UI"/>
+        <a:font script="Mymr" typeface="Myanmar Text"/>
+        <a:font script="Nkoo" typeface="Ebrima"/>
+        <a:font script="Olck" typeface="Nirmala UI"/>
+        <a:font script="Osma" typeface="Ebrima"/>
+        <a:font script="Phag" typeface="Phagspa"/>
+        <a:font script="Syrn" typeface="Estrangelo Edessa"/>
+        <a:font script="Syrj" typeface="Estrangelo Edessa"/>
+        <a:font script="Syre" typeface="Estrangelo Edessa"/>
+        <a:font script="Sora" typeface="Nirmala UI"/>
+        <a:font script="Tale" typeface="Microsoft Tai Le"/>
+        <a:font script="Talu" typeface="Microsoft New Tai Lue"/>
+        <a:font script="Tfng" typeface="Ebrima"/>
+      </a:minorFont>
+    </a:fontScheme>
+    <a:fmtScheme name="Office">
+      <a:fillStyleLst>
+        <a:solidFill>
+          <a:schemeClr val="phClr"/>
+        </a:solidFill>
+        <a:gradFill rotWithShape="1">
+          <a:gsLst>
+            <a:gs pos="0">
+              <a:schemeClr val="phClr">
+                <a:lumMod val="110000"/>
+                <a:satMod val="105000"/>
+                <a:tint val="67000"/>
+              </a:schemeClr>
+            </a:gs>
+            <a:gs pos="50000">
+              <a:schemeClr val="phClr">
+                <a:lumMod val="105000"/>
+                <a:satMod val="103000"/>
+                <a:tint val="73000"/>
+              </a:schemeClr>
+            </a:gs>
+            <a:gs pos="100000">
+              <a:schemeClr val="phClr">
+                <a:lumMod val="105000"/>
+                <a:satMod val="109000"/>
+                <a:tint val="81000"/>
+              </a:schemeClr>
+            </a:gs>
+          </a:gsLst>
+          <a:lin ang="5400000" scaled="0"/>
+        </a:gradFill>
+        <a:gradFill rotWithShape="1">
+          <a:gsLst>
+            <a:gs pos="0">
+              <a:schemeClr val="phClr">
+                <a:satMod val="103000"/>
+                <a:lumMod val="102000"/>
+                <a:tint val="94000"/>
+              </a:schemeClr>
+            </a:gs>
+            <a:gs pos="50000">
+              <a:schemeClr val="phClr">
+                <a:satMod val="110000"/>
+                <a:lumMod val="100000"/>
+                <a:shade val="100000"/>
+              </a:schemeClr>
+            </a:gs>
+            <a:gs pos="100000">
+              <a:schemeClr val="phClr">
+                <a:lumMod val="99000"/>
+                <a:satMod val="120000"/>
+                <a:shade val="78000"/>
+              </a:schemeClr>
+            </a:gs>
+          </a:gsLst>
+          <a:lin ang="5400000" scaled="0"/>
+        </a:gradFill>
+      </a:fillStyleLst>
+      <a:lnStyleLst>
+        <a:ln w="12700" cap="flat" cmpd="sng" algn="ctr">
+          <a:solidFill>
+            <a:schemeClr val="phClr"/>
+          </a:solidFill>
+          <a:prstDash val="solid"/>
+          <a:miter lim="800000"/>
+        </a:ln>
+        <a:ln w="19050" cap="flat" cmpd="sng" algn="ctr">
+          <a:solidFill>
+            <a:schemeClr val="phClr"/>
+          </a:solidFill>
+          <a:prstDash val="solid"/>
+          <a:miter lim="800000"/>
+        </a:ln>
+        <a:ln w="25400" cap="flat" cmpd="sng" algn="ctr">
+          <a:solidFill>
+            <a:schemeClr val="phClr"/>
+          </a:solidFill>
+          <a:prstDash val="solid"/>
+          <a:miter lim="800000"/>
+        </a:ln>
+      </a:lnStyleLst>
+      <a:effectStyleLst>
+        <a:effectStyle>
+          <a:effectLst/>
+        </a:effectStyle>
+        <a:effectStyle>
+          <a:effectLst/>
+        </a:effectStyle>
+        <a:effectStyle>
+          <a:effectLst>
+            <a:outerShdw blurRad="57150" dist="19050" dir="5400000" algn="ctr" rotWithShape="0">
+              <a:srgbClr val="000000">
+                <a:alpha val="63000"/>
+              </a:srgbClr>
+            </a:outerShdw>
+          </a:effectLst>
+        </a:effectStyle>
+      </a:effectStyleLst>
+      <a:bgFillStyleLst>
+        <a:solidFill>
+          <a:schemeClr val="phClr"/>
+        </a:solidFill>
+        <a:solidFill>
+          <a:schemeClr val="phClr">
+            <a:tint val="95000"/>
+            <a:satMod val="170000"/>
+          </a:schemeClr>
+        </a:solidFill>
+        <a:gradFill rotWithShape="1">
+          <a:gsLst>
+            <a:gs pos="0">
+              <a:schemeClr val="phClr">
+                <a:tint val="93000"/>
+                <a:satMod val="150000"/>
+                <a:shade val="98000"/>
+                <a:lumMod val="102000"/>
+              </a:schemeClr>
+            </a:gs>
+            <a:gs pos="50000">
+              <a:schemeClr val="phClr">
+                <a:tint val="98000"/>
+                <a:satMod val="130000"/>
+                <a:shade val="90000"/>
+                <a:lumMod val="103000"/>
+              </a:schemeClr>
+            </a:gs>
+            <a:gs pos="100000">
+              <a:schemeClr val="phClr">
+                <a:shade val="63000"/>
+                <a:satMod val="120000"/>
+              </a:schemeClr>
+            </a:gs>
+          </a:gsLst>
+          <a:lin ang="5400000" scaled="0"/>
+        </a:gradFill>
+      </a:bgFillStyleLst>
+    </a:fmtScheme>
+  </a:themeElements>
+  <a:objectDefaults>
+    <a:lnDef>
+      <a:spPr/>
+      <a:bodyPr/>
+      <a:lstStyle/>
+      <a:style>
+        <a:lnRef idx="2">
+          <a:schemeClr val="accent1"/>
+        </a:lnRef>
+        <a:fillRef idx="0">
+          <a:schemeClr val="accent1"/>
+        </a:fillRef>
+        <a:effectRef idx="1">
+          <a:schemeClr val="accent1"/>
+        </a:effectRef>
+        <a:fontRef idx="minor">
+          <a:schemeClr val="tx1"/>
+        </a:fontRef>
+      </a:style>
+    </a:lnDef>
+  </a:objectDefaults>
+  <a:extraClrSchemeLst/>
+  <a:extLst>
+    <a:ext uri="{05A4C25C-085E-4340-85A3-A5531E510DB2}">
+      <thm15:themeFamily xmlns:thm15="http://schemas.microsoft.com/office/thememl/2012/main" name="Office Theme" id="{2E142A2C-CD16-42D6-873A-C26D2A0506FA}" vid="{1BDDFF52-6CD6-40A5-AB3C-68EB2F1E4D0A}"/>
+    </a:ext>
+  </a:extLst>
+</a:theme>
 </file>